--- a/battery_control/abnormal_heatwave_smoke_test.pptx
+++ b/battery_control/abnormal_heatwave_smoke_test.pptx
@@ -5310,8 +5310,8 @@
         </p:nvSpPr>
         <p:spPr>
           <a:xfrm rot="16200000">
-            <a:off x="10062648" y="4500407"/>
-            <a:ext cx="236389" cy="1222973"/>
+            <a:off x="9938951" y="4624103"/>
+            <a:ext cx="229259" cy="968449"/>
           </a:xfrm>
           <a:prstGeom prst="leftBrace">
             <a:avLst/>
@@ -5445,8 +5445,8 @@
         </p:nvSpPr>
         <p:spPr>
           <a:xfrm rot="16200000">
-            <a:off x="11111049" y="4673592"/>
-            <a:ext cx="230646" cy="868085"/>
+            <a:off x="10984482" y="4545638"/>
+            <a:ext cx="229260" cy="1122608"/>
           </a:xfrm>
           <a:prstGeom prst="leftBrace">
             <a:avLst/>
@@ -5913,53 +5913,6 @@
       </p:sp>
       <p:sp>
         <p:nvSpPr>
-          <p:cNvPr id="10" name="Left Brace 9">
-            <a:extLst>
-              <a:ext uri="{FF2B5EF4-FFF2-40B4-BE49-F238E27FC236}">
-                <a16:creationId xmlns:a16="http://schemas.microsoft.com/office/drawing/2014/main" id="{6752666D-71D0-A089-CF5E-EF1DCE95F6D4}"/>
-              </a:ext>
-            </a:extLst>
-          </p:cNvPr>
-          <p:cNvSpPr/>
-          <p:nvPr/>
-        </p:nvSpPr>
-        <p:spPr>
-          <a:xfrm rot="16200000">
-            <a:off x="10062648" y="4500407"/>
-            <a:ext cx="236389" cy="1222973"/>
-          </a:xfrm>
-          <a:prstGeom prst="leftBrace">
-            <a:avLst/>
-          </a:prstGeom>
-          <a:solidFill>
-            <a:srgbClr val="FFFF00"/>
-          </a:solidFill>
-        </p:spPr>
-        <p:style>
-          <a:lnRef idx="2">
-            <a:schemeClr val="accent1"/>
-          </a:lnRef>
-          <a:fillRef idx="0">
-            <a:schemeClr val="accent1"/>
-          </a:fillRef>
-          <a:effectRef idx="1">
-            <a:schemeClr val="accent1"/>
-          </a:effectRef>
-          <a:fontRef idx="minor">
-            <a:schemeClr val="tx1"/>
-          </a:fontRef>
-        </p:style>
-        <p:txBody>
-          <a:bodyPr rtlCol="0" anchor="ctr"/>
-          <a:lstStyle/>
-          <a:p>
-            <a:pPr algn="ctr"/>
-            <a:endParaRPr lang="en-US"/>
-          </a:p>
-        </p:txBody>
-      </p:sp>
-      <p:sp>
-        <p:nvSpPr>
           <p:cNvPr id="11" name="Left Brace 10">
             <a:extLst>
               <a:ext uri="{FF2B5EF4-FFF2-40B4-BE49-F238E27FC236}">
@@ -6048,10 +6001,45 @@
       </p:cxnSp>
       <p:sp>
         <p:nvSpPr>
-          <p:cNvPr id="12" name="Left Brace 11">
-            <a:extLst>
-              <a:ext uri="{FF2B5EF4-FFF2-40B4-BE49-F238E27FC236}">
-                <a16:creationId xmlns:a16="http://schemas.microsoft.com/office/drawing/2014/main" id="{1A6F37D4-F590-C5B5-B628-49D5A0E71E07}"/>
+          <p:cNvPr id="14" name="TextBox 13">
+            <a:extLst>
+              <a:ext uri="{FF2B5EF4-FFF2-40B4-BE49-F238E27FC236}">
+                <a16:creationId xmlns:a16="http://schemas.microsoft.com/office/drawing/2014/main" id="{6EEB3B6B-ED76-2046-A046-4E465A77832B}"/>
+              </a:ext>
+            </a:extLst>
+          </p:cNvPr>
+          <p:cNvSpPr txBox="1"/>
+          <p:nvPr/>
+        </p:nvSpPr>
+        <p:spPr>
+          <a:xfrm>
+            <a:off x="10628133" y="5253188"/>
+            <a:ext cx="1624263" cy="923330"/>
+          </a:xfrm>
+          <a:prstGeom prst="rect">
+            <a:avLst/>
+          </a:prstGeom>
+          <a:noFill/>
+        </p:spPr>
+        <p:txBody>
+          <a:bodyPr wrap="square" rtlCol="0">
+            <a:spAutoFit/>
+          </a:bodyPr>
+          <a:lstStyle/>
+          <a:p>
+            <a:r>
+              <a:rPr lang="en-US" dirty="0"/>
+              <a:t>Renewable shifting / fossil minimization</a:t>
+            </a:r>
+          </a:p>
+        </p:txBody>
+      </p:sp>
+      <p:sp>
+        <p:nvSpPr>
+          <p:cNvPr id="15" name="Left Brace 14">
+            <a:extLst>
+              <a:ext uri="{FF2B5EF4-FFF2-40B4-BE49-F238E27FC236}">
+                <a16:creationId xmlns:a16="http://schemas.microsoft.com/office/drawing/2014/main" id="{0AA6CA18-8725-A366-FF60-0FB58700C067}"/>
               </a:ext>
             </a:extLst>
           </p:cNvPr>
@@ -6060,8 +6048,55 @@
         </p:nvSpPr>
         <p:spPr>
           <a:xfrm rot="16200000">
-            <a:off x="11111049" y="4673592"/>
-            <a:ext cx="230646" cy="868085"/>
+            <a:off x="9938951" y="4624103"/>
+            <a:ext cx="229259" cy="968449"/>
+          </a:xfrm>
+          <a:prstGeom prst="leftBrace">
+            <a:avLst/>
+          </a:prstGeom>
+          <a:solidFill>
+            <a:srgbClr val="FFFF00"/>
+          </a:solidFill>
+        </p:spPr>
+        <p:style>
+          <a:lnRef idx="2">
+            <a:schemeClr val="accent1"/>
+          </a:lnRef>
+          <a:fillRef idx="0">
+            <a:schemeClr val="accent1"/>
+          </a:fillRef>
+          <a:effectRef idx="1">
+            <a:schemeClr val="accent1"/>
+          </a:effectRef>
+          <a:fontRef idx="minor">
+            <a:schemeClr val="tx1"/>
+          </a:fontRef>
+        </p:style>
+        <p:txBody>
+          <a:bodyPr rtlCol="0" anchor="ctr"/>
+          <a:lstStyle/>
+          <a:p>
+            <a:pPr algn="ctr"/>
+            <a:endParaRPr lang="en-US"/>
+          </a:p>
+        </p:txBody>
+      </p:sp>
+      <p:sp>
+        <p:nvSpPr>
+          <p:cNvPr id="16" name="Left Brace 15">
+            <a:extLst>
+              <a:ext uri="{FF2B5EF4-FFF2-40B4-BE49-F238E27FC236}">
+                <a16:creationId xmlns:a16="http://schemas.microsoft.com/office/drawing/2014/main" id="{4CF7EB8B-C0D4-A51F-6003-50D3CFD32A0A}"/>
+              </a:ext>
+            </a:extLst>
+          </p:cNvPr>
+          <p:cNvSpPr/>
+          <p:nvPr/>
+        </p:nvSpPr>
+        <p:spPr>
+          <a:xfrm rot="16200000">
+            <a:off x="10984482" y="4545638"/>
+            <a:ext cx="229260" cy="1122608"/>
           </a:xfrm>
           <a:prstGeom prst="leftBrace">
             <a:avLst/>
@@ -6090,41 +6125,6 @@
           <a:p>
             <a:pPr algn="ctr"/>
             <a:endParaRPr lang="en-US"/>
-          </a:p>
-        </p:txBody>
-      </p:sp>
-      <p:sp>
-        <p:nvSpPr>
-          <p:cNvPr id="14" name="TextBox 13">
-            <a:extLst>
-              <a:ext uri="{FF2B5EF4-FFF2-40B4-BE49-F238E27FC236}">
-                <a16:creationId xmlns:a16="http://schemas.microsoft.com/office/drawing/2014/main" id="{6EEB3B6B-ED76-2046-A046-4E465A77832B}"/>
-              </a:ext>
-            </a:extLst>
-          </p:cNvPr>
-          <p:cNvSpPr txBox="1"/>
-          <p:nvPr/>
-        </p:nvSpPr>
-        <p:spPr>
-          <a:xfrm>
-            <a:off x="10628133" y="5253188"/>
-            <a:ext cx="1624263" cy="923330"/>
-          </a:xfrm>
-          <a:prstGeom prst="rect">
-            <a:avLst/>
-          </a:prstGeom>
-          <a:noFill/>
-        </p:spPr>
-        <p:txBody>
-          <a:bodyPr wrap="square" rtlCol="0">
-            <a:spAutoFit/>
-          </a:bodyPr>
-          <a:lstStyle/>
-          <a:p>
-            <a:r>
-              <a:rPr lang="en-US" dirty="0"/>
-              <a:t>Renewable shifting / fossil minimization</a:t>
-            </a:r>
           </a:p>
         </p:txBody>
       </p:sp>
@@ -6251,6 +6251,12 @@
               <a:t> the timing</a:t>
             </a:r>
           </a:p>
+          <a:p>
+            <a:r>
+              <a:rPr lang="en-US" dirty="0"/>
+              <a:t>Until the undersupply time is eliminated</a:t>
+            </a:r>
+          </a:p>
         </p:txBody>
       </p:sp>
       <p:pic>
@@ -6493,10 +6499,45 @@
       </p:sp>
       <p:sp>
         <p:nvSpPr>
-          <p:cNvPr id="10" name="Left Brace 9">
-            <a:extLst>
-              <a:ext uri="{FF2B5EF4-FFF2-40B4-BE49-F238E27FC236}">
-                <a16:creationId xmlns:a16="http://schemas.microsoft.com/office/drawing/2014/main" id="{42A3C144-BC75-1479-55DB-38404A8FAAD3}"/>
+          <p:cNvPr id="14" name="TextBox 13">
+            <a:extLst>
+              <a:ext uri="{FF2B5EF4-FFF2-40B4-BE49-F238E27FC236}">
+                <a16:creationId xmlns:a16="http://schemas.microsoft.com/office/drawing/2014/main" id="{798E69EA-57DD-7FE3-1032-D83083A08355}"/>
+              </a:ext>
+            </a:extLst>
+          </p:cNvPr>
+          <p:cNvSpPr txBox="1"/>
+          <p:nvPr/>
+        </p:nvSpPr>
+        <p:spPr>
+          <a:xfrm>
+            <a:off x="10628133" y="5253188"/>
+            <a:ext cx="1624263" cy="923330"/>
+          </a:xfrm>
+          <a:prstGeom prst="rect">
+            <a:avLst/>
+          </a:prstGeom>
+          <a:noFill/>
+        </p:spPr>
+        <p:txBody>
+          <a:bodyPr wrap="square" rtlCol="0">
+            <a:spAutoFit/>
+          </a:bodyPr>
+          <a:lstStyle/>
+          <a:p>
+            <a:r>
+              <a:rPr lang="en-US" dirty="0"/>
+              <a:t>Renewable shifting / fossil minimization</a:t>
+            </a:r>
+          </a:p>
+        </p:txBody>
+      </p:sp>
+      <p:sp>
+        <p:nvSpPr>
+          <p:cNvPr id="17" name="Left Brace 16">
+            <a:extLst>
+              <a:ext uri="{FF2B5EF4-FFF2-40B4-BE49-F238E27FC236}">
+                <a16:creationId xmlns:a16="http://schemas.microsoft.com/office/drawing/2014/main" id="{780E18BE-5CFC-3B1E-D89E-18A355361197}"/>
               </a:ext>
             </a:extLst>
           </p:cNvPr>
@@ -6505,8 +6546,8 @@
         </p:nvSpPr>
         <p:spPr>
           <a:xfrm rot="16200000">
-            <a:off x="9772992" y="4203620"/>
-            <a:ext cx="229259" cy="1809416"/>
+            <a:off x="9646422" y="4330189"/>
+            <a:ext cx="227875" cy="1554892"/>
           </a:xfrm>
           <a:prstGeom prst="leftBrace">
             <a:avLst/>
@@ -6540,10 +6581,10 @@
       </p:sp>
       <p:sp>
         <p:nvSpPr>
-          <p:cNvPr id="12" name="Left Brace 11">
-            <a:extLst>
-              <a:ext uri="{FF2B5EF4-FFF2-40B4-BE49-F238E27FC236}">
-                <a16:creationId xmlns:a16="http://schemas.microsoft.com/office/drawing/2014/main" id="{BDA56576-6FE6-AB25-7D10-5A75FEED0DFB}"/>
+          <p:cNvPr id="18" name="Left Brace 17">
+            <a:extLst>
+              <a:ext uri="{FF2B5EF4-FFF2-40B4-BE49-F238E27FC236}">
+                <a16:creationId xmlns:a16="http://schemas.microsoft.com/office/drawing/2014/main" id="{6969AA08-604E-0AC5-5909-A3FF8DAE5F70}"/>
               </a:ext>
             </a:extLst>
           </p:cNvPr>
@@ -6552,8 +6593,8 @@
         </p:nvSpPr>
         <p:spPr>
           <a:xfrm rot="16200000">
-            <a:off x="11111049" y="4673592"/>
-            <a:ext cx="230646" cy="868085"/>
+            <a:off x="10984482" y="4545638"/>
+            <a:ext cx="229260" cy="1122608"/>
           </a:xfrm>
           <a:prstGeom prst="leftBrace">
             <a:avLst/>
@@ -6582,41 +6623,6 @@
           <a:p>
             <a:pPr algn="ctr"/>
             <a:endParaRPr lang="en-US"/>
-          </a:p>
-        </p:txBody>
-      </p:sp>
-      <p:sp>
-        <p:nvSpPr>
-          <p:cNvPr id="14" name="TextBox 13">
-            <a:extLst>
-              <a:ext uri="{FF2B5EF4-FFF2-40B4-BE49-F238E27FC236}">
-                <a16:creationId xmlns:a16="http://schemas.microsoft.com/office/drawing/2014/main" id="{798E69EA-57DD-7FE3-1032-D83083A08355}"/>
-              </a:ext>
-            </a:extLst>
-          </p:cNvPr>
-          <p:cNvSpPr txBox="1"/>
-          <p:nvPr/>
-        </p:nvSpPr>
-        <p:spPr>
-          <a:xfrm>
-            <a:off x="10628133" y="5253188"/>
-            <a:ext cx="1624263" cy="923330"/>
-          </a:xfrm>
-          <a:prstGeom prst="rect">
-            <a:avLst/>
-          </a:prstGeom>
-          <a:noFill/>
-        </p:spPr>
-        <p:txBody>
-          <a:bodyPr wrap="square" rtlCol="0">
-            <a:spAutoFit/>
-          </a:bodyPr>
-          <a:lstStyle/>
-          <a:p>
-            <a:r>
-              <a:rPr lang="en-US" dirty="0"/>
-              <a:t>Renewable shifting / fossil minimization</a:t>
-            </a:r>
           </a:p>
         </p:txBody>
       </p:sp>

--- a/battery_control/abnormal_heatwave_smoke_test.pptx
+++ b/battery_control/abnormal_heatwave_smoke_test.pptx
@@ -6226,8 +6226,13 @@
           <a:p>
             <a:r>
               <a:rPr lang="en-US" dirty="0"/>
-              <a:t>Undersupply runs just over two days</a:t>
-            </a:r>
+              <a:t>Undersupply </a:t>
+            </a:r>
+            <a:r>
+              <a:rPr lang="en-US"/>
+              <a:t>now eliminated</a:t>
+            </a:r>
+            <a:endParaRPr lang="en-US" dirty="0"/>
           </a:p>
           <a:p>
             <a:r>

--- a/battery_control/abnormal_heatwave_smoke_test.pptx
+++ b/battery_control/abnormal_heatwave_smoke_test.pptx
@@ -150,12 +150,15 @@
               </a:defRPr>
             </a:pPr>
             <a:r>
-              <a:rPr lang="en-US"/>
-              <a:t>Curtailed Load</a:t>
-            </a:r>
-            <a:r>
-              <a:rPr lang="en-US" baseline="0"/>
-              <a:t> vs. Battery Capacity</a:t>
+              <a:rPr lang="en-US" sz="1400" b="0" i="0" u="none" strike="noStrike" kern="1200" spc="0" baseline="0">
+                <a:solidFill>
+                  <a:sysClr val="windowText" lastClr="000000">
+                    <a:lumMod val="65000"/>
+                    <a:lumOff val="35000"/>
+                  </a:sysClr>
+                </a:solidFill>
+              </a:rPr>
+              <a:t>Curtailed Load vs. Battery Capacity</a:t>
             </a:r>
           </a:p>
         </c:rich>
@@ -200,7 +203,7 @@
           <c:order val="0"/>
           <c:tx>
             <c:strRef>
-              <c:f>Sheet1!$B$1</c:f>
+              <c:f>Sheet2!$B$1</c:f>
               <c:strCache>
                 <c:ptCount val="1"/>
                 <c:pt idx="0">
@@ -235,7 +238,7 @@
           </c:marker>
           <c:xVal>
             <c:numRef>
-              <c:f>Sheet1!$A$2:$A$13</c:f>
+              <c:f>Sheet2!$A$2:$A$13</c:f>
               <c:numCache>
                 <c:formatCode>General</c:formatCode>
                 <c:ptCount val="12"/>
@@ -280,21 +283,21 @@
           </c:xVal>
           <c:yVal>
             <c:numRef>
-              <c:f>Sheet1!$B$2:$B$13</c:f>
+              <c:f>Sheet2!$B$2:$B$13</c:f>
               <c:numCache>
                 <c:formatCode>General</c:formatCode>
                 <c:ptCount val="12"/>
                 <c:pt idx="0">
-                  <c:v>40.25</c:v>
+                  <c:v>26.96</c:v>
                 </c:pt>
                 <c:pt idx="1">
-                  <c:v>31.45</c:v>
+                  <c:v>25.02</c:v>
                 </c:pt>
                 <c:pt idx="2">
-                  <c:v>25.15</c:v>
+                  <c:v>23.16</c:v>
                 </c:pt>
                 <c:pt idx="3">
-                  <c:v>21.37</c:v>
+                  <c:v>21.26</c:v>
                 </c:pt>
                 <c:pt idx="4">
                   <c:v>19.89</c:v>
@@ -315,7 +318,7 @@
                   <c:v>1.89</c:v>
                 </c:pt>
                 <c:pt idx="10">
-                  <c:v>0.89</c:v>
+                  <c:v>0.98</c:v>
                 </c:pt>
                 <c:pt idx="11">
                   <c:v>0</c:v>
@@ -326,7 +329,7 @@
           <c:smooth val="0"/>
           <c:extLst>
             <c:ext xmlns:c16="http://schemas.microsoft.com/office/drawing/2014/chart" uri="{C3380CC4-5D6E-409C-BE32-E72D297353CC}">
-              <c16:uniqueId val="{00000000-650D-C94F-98E9-B0203B226E08}"/>
+              <c16:uniqueId val="{00000000-36EF-7F49-908C-D3108A076611}"/>
             </c:ext>
           </c:extLst>
         </c:ser>
@@ -335,7 +338,7 @@
           <c:order val="1"/>
           <c:tx>
             <c:strRef>
-              <c:f>Sheet1!$C$1</c:f>
+              <c:f>Sheet2!$C$1</c:f>
               <c:strCache>
                 <c:ptCount val="1"/>
                 <c:pt idx="0">
@@ -370,7 +373,7 @@
           </c:marker>
           <c:xVal>
             <c:numRef>
-              <c:f>Sheet1!$A$2:$A$13</c:f>
+              <c:f>Sheet2!$A$2:$A$13</c:f>
               <c:numCache>
                 <c:formatCode>General</c:formatCode>
                 <c:ptCount val="12"/>
@@ -415,18 +418,18 @@
           </c:xVal>
           <c:yVal>
             <c:numRef>
-              <c:f>Sheet1!$C$2:$C$13</c:f>
+              <c:f>Sheet2!$C$2:$C$13</c:f>
               <c:numCache>
                 <c:formatCode>General</c:formatCode>
                 <c:ptCount val="12"/>
                 <c:pt idx="0">
-                  <c:v>10.86</c:v>
+                  <c:v>5.78</c:v>
                 </c:pt>
                 <c:pt idx="1">
-                  <c:v>5.15</c:v>
+                  <c:v>3.19</c:v>
                 </c:pt>
                 <c:pt idx="2">
-                  <c:v>1.82</c:v>
+                  <c:v>1.24</c:v>
                 </c:pt>
                 <c:pt idx="3">
                   <c:v>0.24</c:v>
@@ -440,7 +443,7 @@
           <c:smooth val="0"/>
           <c:extLst>
             <c:ext xmlns:c16="http://schemas.microsoft.com/office/drawing/2014/chart" uri="{C3380CC4-5D6E-409C-BE32-E72D297353CC}">
-              <c16:uniqueId val="{00000001-650D-C94F-98E9-B0203B226E08}"/>
+              <c16:uniqueId val="{00000001-36EF-7F49-908C-D3108A076611}"/>
             </c:ext>
           </c:extLst>
         </c:ser>
@@ -452,11 +455,11 @@
           <c:showPercent val="0"/>
           <c:showBubbleSize val="0"/>
         </c:dLbls>
-        <c:axId val="313707440"/>
-        <c:axId val="313709808"/>
+        <c:axId val="639412928"/>
+        <c:axId val="639414640"/>
       </c:scatterChart>
       <c:valAx>
-        <c:axId val="313707440"/>
+        <c:axId val="639412928"/>
         <c:scaling>
           <c:orientation val="minMax"/>
         </c:scaling>
@@ -496,14 +499,16 @@
                   </a:defRPr>
                 </a:pPr>
                 <a:r>
-                  <a:rPr lang="en-US"/>
-                  <a:t>batter</a:t>
+                  <a:rPr lang="en-US" sz="1000" b="0" i="0" u="none" strike="noStrike" kern="1200" baseline="0">
+                    <a:solidFill>
+                      <a:sysClr val="windowText" lastClr="000000">
+                        <a:lumMod val="65000"/>
+                        <a:lumOff val="35000"/>
+                      </a:sysClr>
+                    </a:solidFill>
+                  </a:rPr>
+                  <a:t>batter capacity [GWh]</a:t>
                 </a:r>
-                <a:r>
-                  <a:rPr lang="en-US" baseline="0"/>
-                  <a:t> capacity [GWh]</a:t>
-                </a:r>
-                <a:endParaRPr lang="en-US"/>
               </a:p>
             </c:rich>
           </c:tx>
@@ -573,12 +578,12 @@
             <a:endParaRPr lang="en-US"/>
           </a:p>
         </c:txPr>
-        <c:crossAx val="313709808"/>
+        <c:crossAx val="639414640"/>
         <c:crosses val="autoZero"/>
         <c:crossBetween val="midCat"/>
       </c:valAx>
       <c:valAx>
-        <c:axId val="313709808"/>
+        <c:axId val="639414640"/>
         <c:scaling>
           <c:orientation val="minMax"/>
         </c:scaling>
@@ -618,7 +623,14 @@
                   </a:defRPr>
                 </a:pPr>
                 <a:r>
-                  <a:rPr lang="en-US"/>
+                  <a:rPr lang="en-US" sz="1000" b="0" i="0" u="none" strike="noStrike" kern="1200" baseline="0">
+                    <a:solidFill>
+                      <a:sysClr val="windowText" lastClr="000000">
+                        <a:lumMod val="65000"/>
+                        <a:lumOff val="35000"/>
+                      </a:sysClr>
+                    </a:solidFill>
+                  </a:rPr>
                   <a:t>curtailed load [GWh]</a:t>
                 </a:r>
               </a:p>
@@ -690,7 +702,7 @@
             <a:endParaRPr lang="en-US"/>
           </a:p>
         </c:txPr>
-        <c:crossAx val="313707440"/>
+        <c:crossAx val="639412928"/>
         <c:crosses val="autoZero"/>
         <c:crossBetween val="midCat"/>
       </c:valAx>
@@ -4861,25 +4873,16 @@
           <a:bodyPr/>
           <a:lstStyle/>
           <a:p>
-            <a:r>
-              <a:rPr lang="en-US" dirty="0"/>
-              <a:t>10.4x more initial shortfall</a:t>
-            </a:r>
-          </a:p>
-          <a:p>
-            <a:r>
-              <a:rPr lang="en-US" dirty="0"/>
-              <a:t>6x larger battery capacity required to eliminate load curtailment</a:t>
-            </a:r>
+            <a:endParaRPr lang="en-US" dirty="0"/>
           </a:p>
         </p:txBody>
       </p:sp>
       <p:graphicFrame>
         <p:nvGraphicFramePr>
-          <p:cNvPr id="4" name="Chart 3">
-            <a:extLst>
-              <a:ext uri="{FF2B5EF4-FFF2-40B4-BE49-F238E27FC236}">
-                <a16:creationId xmlns:a16="http://schemas.microsoft.com/office/drawing/2014/main" id="{4AC47795-BE11-B8F5-EE62-8763F8700EB2}"/>
+          <p:cNvPr id="7" name="Chart 6">
+            <a:extLst>
+              <a:ext uri="{FF2B5EF4-FFF2-40B4-BE49-F238E27FC236}">
+                <a16:creationId xmlns:a16="http://schemas.microsoft.com/office/drawing/2014/main" id="{BA8B0CAE-C93D-CFF2-66CD-4625650ADB1C}"/>
               </a:ext>
             </a:extLst>
           </p:cNvPr>
@@ -4889,14 +4892,14 @@
           <p:nvPr>
             <p:extLst>
               <p:ext uri="{D42A27DB-BD31-4B8C-83A1-F6EECF244321}">
-                <p14:modId xmlns:p14="http://schemas.microsoft.com/office/powerpoint/2010/main" val="1653981311"/>
+                <p14:modId xmlns:p14="http://schemas.microsoft.com/office/powerpoint/2010/main" val="165890150"/>
               </p:ext>
             </p:extLst>
           </p:nvPr>
         </p:nvGraphicFramePr>
         <p:xfrm>
-          <a:off x="6096001" y="1383631"/>
-          <a:ext cx="5658852" cy="4644190"/>
+          <a:off x="6516624" y="1825624"/>
+          <a:ext cx="4572000" cy="4351337"/>
         </p:xfrm>
         <a:graphic>
           <a:graphicData uri="http://schemas.openxmlformats.org/drawingml/2006/chart">
@@ -6226,13 +6229,8 @@
           <a:p>
             <a:r>
               <a:rPr lang="en-US" dirty="0"/>
-              <a:t>Undersupply </a:t>
-            </a:r>
-            <a:r>
-              <a:rPr lang="en-US"/>
-              <a:t>now eliminated</a:t>
-            </a:r>
-            <a:endParaRPr lang="en-US" dirty="0"/>
+              <a:t>Undersupply now eliminated</a:t>
+            </a:r>
           </a:p>
           <a:p>
             <a:r>

--- a/battery_control/abnormal_heatwave_smoke_test.pptx
+++ b/battery_control/abnormal_heatwave_smoke_test.pptx
@@ -6,10 +6,12 @@
   </p:sldMasterIdLst>
   <p:sldIdLst>
     <p:sldId id="258" r:id="rId2"/>
-    <p:sldId id="259" r:id="rId3"/>
+    <p:sldId id="264" r:id="rId3"/>
     <p:sldId id="260" r:id="rId4"/>
     <p:sldId id="261" r:id="rId5"/>
     <p:sldId id="262" r:id="rId6"/>
+    <p:sldId id="263" r:id="rId7"/>
+    <p:sldId id="265" r:id="rId8"/>
   </p:sldIdLst>
   <p:sldSz cx="12192000" cy="6858000"/>
   <p:notesSz cx="6858000" cy="9144000"/>
@@ -150,16 +152,14 @@
               </a:defRPr>
             </a:pPr>
             <a:r>
-              <a:rPr lang="en-US" sz="1400" b="0" i="0" u="none" strike="noStrike" kern="1200" spc="0" baseline="0">
-                <a:solidFill>
-                  <a:sysClr val="windowText" lastClr="000000">
-                    <a:lumMod val="65000"/>
-                    <a:lumOff val="35000"/>
-                  </a:sysClr>
-                </a:solidFill>
-              </a:rPr>
-              <a:t>Curtailed Load vs. Battery Capacity</a:t>
-            </a:r>
+              <a:rPr lang="en-US"/>
+              <a:t>Event</a:t>
+            </a:r>
+            <a:r>
+              <a:rPr lang="en-US" baseline="0"/>
+              <a:t> Load Curtailment versus Battery size</a:t>
+            </a:r>
+            <a:endParaRPr lang="en-US"/>
           </a:p>
         </c:rich>
       </c:tx>
@@ -203,11 +203,14 @@
           <c:order val="0"/>
           <c:tx>
             <c:strRef>
-              <c:f>Sheet2!$B$1</c:f>
+              <c:f>Sheet3!$B$1:$B$2</c:f>
               <c:strCache>
-                <c:ptCount val="1"/>
+                <c:ptCount val="2"/>
                 <c:pt idx="0">
-                  <c:v>with event</c:v>
+                  <c:v>curtailed load</c:v>
+                </c:pt>
+                <c:pt idx="1">
+                  <c:v>optimal</c:v>
                 </c:pt>
               </c:strCache>
             </c:strRef>
@@ -238,10 +241,10 @@
           </c:marker>
           <c:xVal>
             <c:numRef>
-              <c:f>Sheet2!$A$2:$A$13</c:f>
+              <c:f>Sheet3!$A$3:$A$23</c:f>
               <c:numCache>
                 <c:formatCode>General</c:formatCode>
-                <c:ptCount val="12"/>
+                <c:ptCount val="21"/>
                 <c:pt idx="0">
                   <c:v>0</c:v>
                 </c:pt>
@@ -261,43 +264,70 @@
                   <c:v>8</c:v>
                 </c:pt>
                 <c:pt idx="6">
-                  <c:v>12</c:v>
+                  <c:v>16</c:v>
                 </c:pt>
                 <c:pt idx="7">
-                  <c:v>18</c:v>
+                  <c:v>21</c:v>
                 </c:pt>
                 <c:pt idx="8">
-                  <c:v>21</c:v>
+                  <c:v>22</c:v>
                 </c:pt>
                 <c:pt idx="9">
-                  <c:v>22</c:v>
+                  <c:v>23</c:v>
                 </c:pt>
                 <c:pt idx="10">
-                  <c:v>23</c:v>
+                  <c:v>24</c:v>
                 </c:pt>
                 <c:pt idx="11">
-                  <c:v>24</c:v>
+                  <c:v>30</c:v>
+                </c:pt>
+                <c:pt idx="12">
+                  <c:v>33</c:v>
+                </c:pt>
+                <c:pt idx="13">
+                  <c:v>34</c:v>
+                </c:pt>
+                <c:pt idx="14">
+                  <c:v>40</c:v>
+                </c:pt>
+                <c:pt idx="15">
+                  <c:v>50</c:v>
+                </c:pt>
+                <c:pt idx="16">
+                  <c:v>100</c:v>
+                </c:pt>
+                <c:pt idx="17">
+                  <c:v>150</c:v>
+                </c:pt>
+                <c:pt idx="18">
+                  <c:v>175</c:v>
+                </c:pt>
+                <c:pt idx="19">
+                  <c:v>190</c:v>
+                </c:pt>
+                <c:pt idx="20">
+                  <c:v>194</c:v>
                 </c:pt>
               </c:numCache>
             </c:numRef>
           </c:xVal>
           <c:yVal>
             <c:numRef>
-              <c:f>Sheet2!$B$2:$B$13</c:f>
+              <c:f>Sheet3!$B$3:$B$23</c:f>
               <c:numCache>
                 <c:formatCode>General</c:formatCode>
-                <c:ptCount val="12"/>
+                <c:ptCount val="21"/>
                 <c:pt idx="0">
-                  <c:v>26.96</c:v>
+                  <c:v>48.63</c:v>
                 </c:pt>
                 <c:pt idx="1">
-                  <c:v>25.02</c:v>
+                  <c:v>33.15</c:v>
                 </c:pt>
                 <c:pt idx="2">
-                  <c:v>23.16</c:v>
+                  <c:v>25.15</c:v>
                 </c:pt>
                 <c:pt idx="3">
-                  <c:v>21.26</c:v>
+                  <c:v>21.37</c:v>
                 </c:pt>
                 <c:pt idx="4">
                   <c:v>19.89</c:v>
@@ -306,21 +336,18 @@
                   <c:v>15.89</c:v>
                 </c:pt>
                 <c:pt idx="6">
-                  <c:v>11.89</c:v>
+                  <c:v>7.89</c:v>
                 </c:pt>
                 <c:pt idx="7">
-                  <c:v>5.89</c:v>
+                  <c:v>2.89</c:v>
                 </c:pt>
                 <c:pt idx="8">
-                  <c:v>2.89</c:v>
+                  <c:v>1.89</c:v>
                 </c:pt>
                 <c:pt idx="9">
-                  <c:v>1.89</c:v>
+                  <c:v>0.89</c:v>
                 </c:pt>
                 <c:pt idx="10">
-                  <c:v>0.98</c:v>
-                </c:pt>
-                <c:pt idx="11">
                   <c:v>0</c:v>
                 </c:pt>
               </c:numCache>
@@ -329,7 +356,7 @@
           <c:smooth val="0"/>
           <c:extLst>
             <c:ext xmlns:c16="http://schemas.microsoft.com/office/drawing/2014/chart" uri="{C3380CC4-5D6E-409C-BE32-E72D297353CC}">
-              <c16:uniqueId val="{00000000-36EF-7F49-908C-D3108A076611}"/>
+              <c16:uniqueId val="{00000000-99A1-C84C-82E0-AD2BE39BA6F8}"/>
             </c:ext>
           </c:extLst>
         </c:ser>
@@ -338,11 +365,14 @@
           <c:order val="1"/>
           <c:tx>
             <c:strRef>
-              <c:f>Sheet2!$C$1</c:f>
+              <c:f>Sheet3!$C$1:$C$2</c:f>
               <c:strCache>
-                <c:ptCount val="1"/>
+                <c:ptCount val="2"/>
                 <c:pt idx="0">
-                  <c:v>without event</c:v>
+                  <c:v>curtailed load</c:v>
+                </c:pt>
+                <c:pt idx="1">
+                  <c:v>battery-p</c:v>
                 </c:pt>
               </c:strCache>
             </c:strRef>
@@ -373,10 +403,10 @@
           </c:marker>
           <c:xVal>
             <c:numRef>
-              <c:f>Sheet2!$A$2:$A$13</c:f>
+              <c:f>Sheet3!$A$3:$A$23</c:f>
               <c:numCache>
                 <c:formatCode>General</c:formatCode>
-                <c:ptCount val="12"/>
+                <c:ptCount val="21"/>
                 <c:pt idx="0">
                   <c:v>0</c:v>
                 </c:pt>
@@ -396,46 +426,121 @@
                   <c:v>8</c:v>
                 </c:pt>
                 <c:pt idx="6">
-                  <c:v>12</c:v>
+                  <c:v>16</c:v>
                 </c:pt>
                 <c:pt idx="7">
-                  <c:v>18</c:v>
+                  <c:v>21</c:v>
                 </c:pt>
                 <c:pt idx="8">
-                  <c:v>21</c:v>
+                  <c:v>22</c:v>
                 </c:pt>
                 <c:pt idx="9">
-                  <c:v>22</c:v>
+                  <c:v>23</c:v>
                 </c:pt>
                 <c:pt idx="10">
-                  <c:v>23</c:v>
+                  <c:v>24</c:v>
                 </c:pt>
                 <c:pt idx="11">
-                  <c:v>24</c:v>
+                  <c:v>30</c:v>
+                </c:pt>
+                <c:pt idx="12">
+                  <c:v>33</c:v>
+                </c:pt>
+                <c:pt idx="13">
+                  <c:v>34</c:v>
+                </c:pt>
+                <c:pt idx="14">
+                  <c:v>40</c:v>
+                </c:pt>
+                <c:pt idx="15">
+                  <c:v>50</c:v>
+                </c:pt>
+                <c:pt idx="16">
+                  <c:v>100</c:v>
+                </c:pt>
+                <c:pt idx="17">
+                  <c:v>150</c:v>
+                </c:pt>
+                <c:pt idx="18">
+                  <c:v>175</c:v>
+                </c:pt>
+                <c:pt idx="19">
+                  <c:v>190</c:v>
+                </c:pt>
+                <c:pt idx="20">
+                  <c:v>194</c:v>
                 </c:pt>
               </c:numCache>
             </c:numRef>
           </c:xVal>
           <c:yVal>
             <c:numRef>
-              <c:f>Sheet2!$C$2:$C$13</c:f>
+              <c:f>Sheet3!$C$3:$C$23</c:f>
               <c:numCache>
                 <c:formatCode>General</c:formatCode>
-                <c:ptCount val="12"/>
+                <c:ptCount val="21"/>
                 <c:pt idx="0">
-                  <c:v>5.78</c:v>
+                  <c:v>48.63</c:v>
                 </c:pt>
                 <c:pt idx="1">
-                  <c:v>3.19</c:v>
+                  <c:v>42.45</c:v>
                 </c:pt>
                 <c:pt idx="2">
-                  <c:v>1.24</c:v>
+                  <c:v>41.3</c:v>
                 </c:pt>
                 <c:pt idx="3">
-                  <c:v>0.24</c:v>
+                  <c:v>39.74</c:v>
                 </c:pt>
                 <c:pt idx="4">
-                  <c:v>0</c:v>
+                  <c:v>39.020000000000003</c:v>
+                </c:pt>
+                <c:pt idx="5">
+                  <c:v>37.29</c:v>
+                </c:pt>
+                <c:pt idx="6">
+                  <c:v>36.44</c:v>
+                </c:pt>
+                <c:pt idx="7">
+                  <c:v>35.96</c:v>
+                </c:pt>
+                <c:pt idx="8">
+                  <c:v>35.700000000000003</c:v>
+                </c:pt>
+                <c:pt idx="9">
+                  <c:v>35.619999999999997</c:v>
+                </c:pt>
+                <c:pt idx="10">
+                  <c:v>35.35</c:v>
+                </c:pt>
+                <c:pt idx="11">
+                  <c:v>34.74</c:v>
+                </c:pt>
+                <c:pt idx="12">
+                  <c:v>33.799999999999997</c:v>
+                </c:pt>
+                <c:pt idx="13">
+                  <c:v>33.74</c:v>
+                </c:pt>
+                <c:pt idx="14">
+                  <c:v>31.07</c:v>
+                </c:pt>
+                <c:pt idx="15">
+                  <c:v>29.28</c:v>
+                </c:pt>
+                <c:pt idx="16">
+                  <c:v>13.51</c:v>
+                </c:pt>
+                <c:pt idx="17">
+                  <c:v>6.52</c:v>
+                </c:pt>
+                <c:pt idx="18">
+                  <c:v>3.82</c:v>
+                </c:pt>
+                <c:pt idx="19">
+                  <c:v>0.88</c:v>
+                </c:pt>
+                <c:pt idx="20">
+                  <c:v>0.62</c:v>
                 </c:pt>
               </c:numCache>
             </c:numRef>
@@ -443,7 +548,178 @@
           <c:smooth val="0"/>
           <c:extLst>
             <c:ext xmlns:c16="http://schemas.microsoft.com/office/drawing/2014/chart" uri="{C3380CC4-5D6E-409C-BE32-E72D297353CC}">
-              <c16:uniqueId val="{00000001-36EF-7F49-908C-D3108A076611}"/>
+              <c16:uniqueId val="{00000001-99A1-C84C-82E0-AD2BE39BA6F8}"/>
+            </c:ext>
+          </c:extLst>
+        </c:ser>
+        <c:ser>
+          <c:idx val="2"/>
+          <c:order val="2"/>
+          <c:tx>
+            <c:strRef>
+              <c:f>Sheet3!$D$1:$D$2</c:f>
+              <c:strCache>
+                <c:ptCount val="2"/>
+                <c:pt idx="0">
+                  <c:v>curtailed load</c:v>
+                </c:pt>
+                <c:pt idx="1">
+                  <c:v>utility-p</c:v>
+                </c:pt>
+              </c:strCache>
+            </c:strRef>
+          </c:tx>
+          <c:spPr>
+            <a:ln w="19050" cap="rnd">
+              <a:solidFill>
+                <a:schemeClr val="accent3"/>
+              </a:solidFill>
+              <a:round/>
+            </a:ln>
+            <a:effectLst/>
+          </c:spPr>
+          <c:marker>
+            <c:symbol val="circle"/>
+            <c:size val="5"/>
+            <c:spPr>
+              <a:solidFill>
+                <a:schemeClr val="accent3"/>
+              </a:solidFill>
+              <a:ln w="9525">
+                <a:solidFill>
+                  <a:schemeClr val="accent3"/>
+                </a:solidFill>
+              </a:ln>
+              <a:effectLst/>
+            </c:spPr>
+          </c:marker>
+          <c:xVal>
+            <c:numRef>
+              <c:f>Sheet3!$A$3:$A$23</c:f>
+              <c:numCache>
+                <c:formatCode>General</c:formatCode>
+                <c:ptCount val="21"/>
+                <c:pt idx="0">
+                  <c:v>0</c:v>
+                </c:pt>
+                <c:pt idx="1">
+                  <c:v>1</c:v>
+                </c:pt>
+                <c:pt idx="2">
+                  <c:v>2</c:v>
+                </c:pt>
+                <c:pt idx="3">
+                  <c:v>3</c:v>
+                </c:pt>
+                <c:pt idx="4">
+                  <c:v>4</c:v>
+                </c:pt>
+                <c:pt idx="5">
+                  <c:v>8</c:v>
+                </c:pt>
+                <c:pt idx="6">
+                  <c:v>16</c:v>
+                </c:pt>
+                <c:pt idx="7">
+                  <c:v>21</c:v>
+                </c:pt>
+                <c:pt idx="8">
+                  <c:v>22</c:v>
+                </c:pt>
+                <c:pt idx="9">
+                  <c:v>23</c:v>
+                </c:pt>
+                <c:pt idx="10">
+                  <c:v>24</c:v>
+                </c:pt>
+                <c:pt idx="11">
+                  <c:v>30</c:v>
+                </c:pt>
+                <c:pt idx="12">
+                  <c:v>33</c:v>
+                </c:pt>
+                <c:pt idx="13">
+                  <c:v>34</c:v>
+                </c:pt>
+                <c:pt idx="14">
+                  <c:v>40</c:v>
+                </c:pt>
+                <c:pt idx="15">
+                  <c:v>50</c:v>
+                </c:pt>
+                <c:pt idx="16">
+                  <c:v>100</c:v>
+                </c:pt>
+                <c:pt idx="17">
+                  <c:v>150</c:v>
+                </c:pt>
+                <c:pt idx="18">
+                  <c:v>175</c:v>
+                </c:pt>
+                <c:pt idx="19">
+                  <c:v>190</c:v>
+                </c:pt>
+                <c:pt idx="20">
+                  <c:v>194</c:v>
+                </c:pt>
+              </c:numCache>
+            </c:numRef>
+          </c:xVal>
+          <c:yVal>
+            <c:numRef>
+              <c:f>Sheet3!$D$3:$D$23</c:f>
+              <c:numCache>
+                <c:formatCode>General</c:formatCode>
+                <c:ptCount val="21"/>
+                <c:pt idx="0">
+                  <c:v>48.63</c:v>
+                </c:pt>
+                <c:pt idx="1">
+                  <c:v>36.08</c:v>
+                </c:pt>
+                <c:pt idx="2">
+                  <c:v>31.99</c:v>
+                </c:pt>
+                <c:pt idx="3">
+                  <c:v>30.42</c:v>
+                </c:pt>
+                <c:pt idx="4">
+                  <c:v>29.42</c:v>
+                </c:pt>
+                <c:pt idx="5">
+                  <c:v>25.42</c:v>
+                </c:pt>
+                <c:pt idx="6">
+                  <c:v>17.420000000000002</c:v>
+                </c:pt>
+                <c:pt idx="7">
+                  <c:v>12.42</c:v>
+                </c:pt>
+                <c:pt idx="8">
+                  <c:v>11.42</c:v>
+                </c:pt>
+                <c:pt idx="9">
+                  <c:v>10.42</c:v>
+                </c:pt>
+                <c:pt idx="10">
+                  <c:v>9.42</c:v>
+                </c:pt>
+                <c:pt idx="11">
+                  <c:v>3.42</c:v>
+                </c:pt>
+                <c:pt idx="12">
+                  <c:v>0.42</c:v>
+                </c:pt>
+                <c:pt idx="13">
+                  <c:v>0</c:v>
+                </c:pt>
+              </c:numCache>
+            </c:numRef>
+          </c:yVal>
+          <c:smooth val="0"/>
+          <c:extLst>
+            <c:ext xmlns:c16="http://schemas.microsoft.com/office/drawing/2014/chart" uri="{C3380CC4-5D6E-409C-BE32-E72D297353CC}">
+              <c16:uniqueId val="{00000002-99A1-C84C-82E0-AD2BE39BA6F8}"/>
             </c:ext>
           </c:extLst>
         </c:ser>
@@ -455,11 +731,877 @@
           <c:showPercent val="0"/>
           <c:showBubbleSize val="0"/>
         </c:dLbls>
-        <c:axId val="639412928"/>
-        <c:axId val="639414640"/>
+        <c:axId val="275269439"/>
+        <c:axId val="275052367"/>
       </c:scatterChart>
       <c:valAx>
-        <c:axId val="639412928"/>
+        <c:axId val="275269439"/>
+        <c:scaling>
+          <c:orientation val="minMax"/>
+          <c:max val="75"/>
+          <c:min val="0"/>
+        </c:scaling>
+        <c:delete val="0"/>
+        <c:axPos val="b"/>
+        <c:majorGridlines>
+          <c:spPr>
+            <a:ln w="9525" cap="flat" cmpd="sng" algn="ctr">
+              <a:solidFill>
+                <a:schemeClr val="tx1">
+                  <a:lumMod val="15000"/>
+                  <a:lumOff val="85000"/>
+                </a:schemeClr>
+              </a:solidFill>
+              <a:round/>
+            </a:ln>
+            <a:effectLst/>
+          </c:spPr>
+        </c:majorGridlines>
+        <c:numFmt formatCode="General" sourceLinked="1"/>
+        <c:majorTickMark val="none"/>
+        <c:minorTickMark val="none"/>
+        <c:tickLblPos val="nextTo"/>
+        <c:spPr>
+          <a:noFill/>
+          <a:ln w="9525" cap="flat" cmpd="sng" algn="ctr">
+            <a:solidFill>
+              <a:schemeClr val="tx1">
+                <a:lumMod val="25000"/>
+                <a:lumOff val="75000"/>
+              </a:schemeClr>
+            </a:solidFill>
+            <a:round/>
+          </a:ln>
+          <a:effectLst/>
+        </c:spPr>
+        <c:txPr>
+          <a:bodyPr rot="-60000000" spcFirstLastPara="1" vertOverflow="ellipsis" vert="horz" wrap="square" anchor="ctr" anchorCtr="1"/>
+          <a:lstStyle/>
+          <a:p>
+            <a:pPr>
+              <a:defRPr sz="900" b="0" i="0" u="none" strike="noStrike" kern="1200" baseline="0">
+                <a:solidFill>
+                  <a:schemeClr val="tx1">
+                    <a:lumMod val="65000"/>
+                    <a:lumOff val="35000"/>
+                  </a:schemeClr>
+                </a:solidFill>
+                <a:latin typeface="+mn-lt"/>
+                <a:ea typeface="+mn-ea"/>
+                <a:cs typeface="+mn-cs"/>
+              </a:defRPr>
+            </a:pPr>
+            <a:endParaRPr lang="en-US"/>
+          </a:p>
+        </c:txPr>
+        <c:crossAx val="275052367"/>
+        <c:crosses val="autoZero"/>
+        <c:crossBetween val="midCat"/>
+      </c:valAx>
+      <c:valAx>
+        <c:axId val="275052367"/>
+        <c:scaling>
+          <c:orientation val="minMax"/>
+        </c:scaling>
+        <c:delete val="0"/>
+        <c:axPos val="l"/>
+        <c:majorGridlines>
+          <c:spPr>
+            <a:ln w="9525" cap="flat" cmpd="sng" algn="ctr">
+              <a:solidFill>
+                <a:schemeClr val="tx1">
+                  <a:lumMod val="15000"/>
+                  <a:lumOff val="85000"/>
+                </a:schemeClr>
+              </a:solidFill>
+              <a:round/>
+            </a:ln>
+            <a:effectLst/>
+          </c:spPr>
+        </c:majorGridlines>
+        <c:numFmt formatCode="General" sourceLinked="1"/>
+        <c:majorTickMark val="none"/>
+        <c:minorTickMark val="none"/>
+        <c:tickLblPos val="nextTo"/>
+        <c:spPr>
+          <a:noFill/>
+          <a:ln w="9525" cap="flat" cmpd="sng" algn="ctr">
+            <a:solidFill>
+              <a:schemeClr val="tx1">
+                <a:lumMod val="25000"/>
+                <a:lumOff val="75000"/>
+              </a:schemeClr>
+            </a:solidFill>
+            <a:round/>
+          </a:ln>
+          <a:effectLst/>
+        </c:spPr>
+        <c:txPr>
+          <a:bodyPr rot="-60000000" spcFirstLastPara="1" vertOverflow="ellipsis" vert="horz" wrap="square" anchor="ctr" anchorCtr="1"/>
+          <a:lstStyle/>
+          <a:p>
+            <a:pPr>
+              <a:defRPr sz="900" b="0" i="0" u="none" strike="noStrike" kern="1200" baseline="0">
+                <a:solidFill>
+                  <a:schemeClr val="tx1">
+                    <a:lumMod val="65000"/>
+                    <a:lumOff val="35000"/>
+                  </a:schemeClr>
+                </a:solidFill>
+                <a:latin typeface="+mn-lt"/>
+                <a:ea typeface="+mn-ea"/>
+                <a:cs typeface="+mn-cs"/>
+              </a:defRPr>
+            </a:pPr>
+            <a:endParaRPr lang="en-US"/>
+          </a:p>
+        </c:txPr>
+        <c:crossAx val="275269439"/>
+        <c:crosses val="autoZero"/>
+        <c:crossBetween val="midCat"/>
+      </c:valAx>
+      <c:spPr>
+        <a:noFill/>
+        <a:ln>
+          <a:noFill/>
+        </a:ln>
+        <a:effectLst/>
+      </c:spPr>
+    </c:plotArea>
+    <c:legend>
+      <c:legendPos val="b"/>
+      <c:overlay val="0"/>
+      <c:spPr>
+        <a:noFill/>
+        <a:ln>
+          <a:noFill/>
+        </a:ln>
+        <a:effectLst/>
+      </c:spPr>
+      <c:txPr>
+        <a:bodyPr rot="0" spcFirstLastPara="1" vertOverflow="ellipsis" vert="horz" wrap="square" anchor="ctr" anchorCtr="1"/>
+        <a:lstStyle/>
+        <a:p>
+          <a:pPr>
+            <a:defRPr sz="900" b="0" i="0" u="none" strike="noStrike" kern="1200" baseline="0">
+              <a:solidFill>
+                <a:schemeClr val="tx1">
+                  <a:lumMod val="65000"/>
+                  <a:lumOff val="35000"/>
+                </a:schemeClr>
+              </a:solidFill>
+              <a:latin typeface="+mn-lt"/>
+              <a:ea typeface="+mn-ea"/>
+              <a:cs typeface="+mn-cs"/>
+            </a:defRPr>
+          </a:pPr>
+          <a:endParaRPr lang="en-US"/>
+        </a:p>
+      </c:txPr>
+    </c:legend>
+    <c:plotVisOnly val="1"/>
+    <c:dispBlanksAs val="gap"/>
+    <c:showDLblsOverMax val="0"/>
+    <c:extLst>
+      <c:ext xmlns:c16r3="http://schemas.microsoft.com/office/drawing/2017/03/chart" uri="{56B9EC1D-385E-4148-901F-78D8002777C0}">
+        <c16r3:dataDisplayOptions16>
+          <c16r3:dispNaAsBlank val="1"/>
+        </c16r3:dataDisplayOptions16>
+      </c:ext>
+    </c:extLst>
+  </c:chart>
+  <c:spPr>
+    <a:noFill/>
+    <a:ln>
+      <a:noFill/>
+    </a:ln>
+    <a:effectLst/>
+  </c:spPr>
+  <c:txPr>
+    <a:bodyPr/>
+    <a:lstStyle/>
+    <a:p>
+      <a:pPr>
+        <a:defRPr/>
+      </a:pPr>
+      <a:endParaRPr lang="en-US"/>
+    </a:p>
+  </c:txPr>
+  <c:externalData r:id="rId3">
+    <c:autoUpdate val="0"/>
+  </c:externalData>
+</c:chartSpace>
+</file>
+
+<file path=ppt/charts/chart2.xml><?xml version="1.0" encoding="utf-8"?>
+<c:chartSpace xmlns:c="http://schemas.openxmlformats.org/drawingml/2006/chart" xmlns:a="http://schemas.openxmlformats.org/drawingml/2006/main" xmlns:r="http://schemas.openxmlformats.org/officeDocument/2006/relationships" xmlns:c16r2="http://schemas.microsoft.com/office/drawing/2015/06/chart">
+  <c:date1904 val="0"/>
+  <c:lang val="en-US"/>
+  <c:roundedCorners val="0"/>
+  <mc:AlternateContent xmlns:mc="http://schemas.openxmlformats.org/markup-compatibility/2006">
+    <mc:Choice xmlns:c14="http://schemas.microsoft.com/office/drawing/2007/8/2/chart" Requires="c14">
+      <c14:style val="102"/>
+    </mc:Choice>
+    <mc:Fallback>
+      <c:style val="2"/>
+    </mc:Fallback>
+  </mc:AlternateContent>
+  <c:chart>
+    <c:title>
+      <c:tx>
+        <c:rich>
+          <a:bodyPr rot="0" spcFirstLastPara="1" vertOverflow="ellipsis" vert="horz" wrap="square" anchor="ctr" anchorCtr="1"/>
+          <a:lstStyle/>
+          <a:p>
+            <a:pPr>
+              <a:defRPr sz="1400" b="0" i="0" u="none" strike="noStrike" kern="1200" spc="0" baseline="0">
+                <a:solidFill>
+                  <a:schemeClr val="tx1">
+                    <a:lumMod val="65000"/>
+                    <a:lumOff val="35000"/>
+                  </a:schemeClr>
+                </a:solidFill>
+                <a:latin typeface="+mn-lt"/>
+                <a:ea typeface="+mn-ea"/>
+                <a:cs typeface="+mn-cs"/>
+              </a:defRPr>
+            </a:pPr>
+            <a:r>
+              <a:rPr lang="en-US" dirty="0"/>
+              <a:t>Event Renewable Generation Curtailment</a:t>
+            </a:r>
+            <a:r>
+              <a:rPr lang="en-US" baseline="0" dirty="0"/>
+              <a:t> versus Battery Size</a:t>
+            </a:r>
+            <a:endParaRPr lang="en-US" dirty="0"/>
+          </a:p>
+        </c:rich>
+      </c:tx>
+      <c:overlay val="0"/>
+      <c:spPr>
+        <a:noFill/>
+        <a:ln>
+          <a:noFill/>
+        </a:ln>
+        <a:effectLst/>
+      </c:spPr>
+      <c:txPr>
+        <a:bodyPr rot="0" spcFirstLastPara="1" vertOverflow="ellipsis" vert="horz" wrap="square" anchor="ctr" anchorCtr="1"/>
+        <a:lstStyle/>
+        <a:p>
+          <a:pPr>
+            <a:defRPr sz="1400" b="0" i="0" u="none" strike="noStrike" kern="1200" spc="0" baseline="0">
+              <a:solidFill>
+                <a:schemeClr val="tx1">
+                  <a:lumMod val="65000"/>
+                  <a:lumOff val="35000"/>
+                </a:schemeClr>
+              </a:solidFill>
+              <a:latin typeface="+mn-lt"/>
+              <a:ea typeface="+mn-ea"/>
+              <a:cs typeface="+mn-cs"/>
+            </a:defRPr>
+          </a:pPr>
+          <a:endParaRPr lang="en-US"/>
+        </a:p>
+      </c:txPr>
+    </c:title>
+    <c:autoTitleDeleted val="0"/>
+    <c:plotArea>
+      <c:layout/>
+      <c:scatterChart>
+        <c:scatterStyle val="lineMarker"/>
+        <c:varyColors val="0"/>
+        <c:ser>
+          <c:idx val="0"/>
+          <c:order val="0"/>
+          <c:tx>
+            <c:strRef>
+              <c:f>Sheet3!$E$1:$E$2</c:f>
+              <c:strCache>
+                <c:ptCount val="2"/>
+                <c:pt idx="0">
+                  <c:v>curtailed renewable</c:v>
+                </c:pt>
+                <c:pt idx="1">
+                  <c:v>optimal</c:v>
+                </c:pt>
+              </c:strCache>
+            </c:strRef>
+          </c:tx>
+          <c:spPr>
+            <a:ln w="19050" cap="rnd">
+              <a:solidFill>
+                <a:schemeClr val="accent1"/>
+              </a:solidFill>
+              <a:round/>
+            </a:ln>
+            <a:effectLst/>
+          </c:spPr>
+          <c:marker>
+            <c:symbol val="circle"/>
+            <c:size val="5"/>
+            <c:spPr>
+              <a:solidFill>
+                <a:schemeClr val="accent1"/>
+              </a:solidFill>
+              <a:ln w="9525">
+                <a:solidFill>
+                  <a:schemeClr val="accent1"/>
+                </a:solidFill>
+              </a:ln>
+              <a:effectLst/>
+            </c:spPr>
+          </c:marker>
+          <c:xVal>
+            <c:numRef>
+              <c:f>Sheet3!$A$3:$A$23</c:f>
+              <c:numCache>
+                <c:formatCode>General</c:formatCode>
+                <c:ptCount val="21"/>
+                <c:pt idx="0">
+                  <c:v>0</c:v>
+                </c:pt>
+                <c:pt idx="1">
+                  <c:v>1</c:v>
+                </c:pt>
+                <c:pt idx="2">
+                  <c:v>2</c:v>
+                </c:pt>
+                <c:pt idx="3">
+                  <c:v>3</c:v>
+                </c:pt>
+                <c:pt idx="4">
+                  <c:v>4</c:v>
+                </c:pt>
+                <c:pt idx="5">
+                  <c:v>8</c:v>
+                </c:pt>
+                <c:pt idx="6">
+                  <c:v>16</c:v>
+                </c:pt>
+                <c:pt idx="7">
+                  <c:v>21</c:v>
+                </c:pt>
+                <c:pt idx="8">
+                  <c:v>22</c:v>
+                </c:pt>
+                <c:pt idx="9">
+                  <c:v>23</c:v>
+                </c:pt>
+                <c:pt idx="10">
+                  <c:v>24</c:v>
+                </c:pt>
+                <c:pt idx="11">
+                  <c:v>30</c:v>
+                </c:pt>
+                <c:pt idx="12">
+                  <c:v>33</c:v>
+                </c:pt>
+                <c:pt idx="13">
+                  <c:v>34</c:v>
+                </c:pt>
+                <c:pt idx="14">
+                  <c:v>40</c:v>
+                </c:pt>
+                <c:pt idx="15">
+                  <c:v>50</c:v>
+                </c:pt>
+                <c:pt idx="16">
+                  <c:v>100</c:v>
+                </c:pt>
+                <c:pt idx="17">
+                  <c:v>150</c:v>
+                </c:pt>
+                <c:pt idx="18">
+                  <c:v>175</c:v>
+                </c:pt>
+                <c:pt idx="19">
+                  <c:v>190</c:v>
+                </c:pt>
+                <c:pt idx="20">
+                  <c:v>194</c:v>
+                </c:pt>
+              </c:numCache>
+            </c:numRef>
+          </c:xVal>
+          <c:yVal>
+            <c:numRef>
+              <c:f>Sheet3!$E$3:$E$23</c:f>
+              <c:numCache>
+                <c:formatCode>General</c:formatCode>
+                <c:ptCount val="21"/>
+                <c:pt idx="0">
+                  <c:v>200.89</c:v>
+                </c:pt>
+                <c:pt idx="1">
+                  <c:v>179.1</c:v>
+                </c:pt>
+                <c:pt idx="2">
+                  <c:v>159.1</c:v>
+                </c:pt>
+                <c:pt idx="3">
+                  <c:v>139.1</c:v>
+                </c:pt>
+                <c:pt idx="4">
+                  <c:v>119.94</c:v>
+                </c:pt>
+                <c:pt idx="5">
+                  <c:v>63.36</c:v>
+                </c:pt>
+                <c:pt idx="6">
+                  <c:v>36.75</c:v>
+                </c:pt>
+                <c:pt idx="7">
+                  <c:v>31.7</c:v>
+                </c:pt>
+                <c:pt idx="8">
+                  <c:v>30.69</c:v>
+                </c:pt>
+                <c:pt idx="9">
+                  <c:v>30.35</c:v>
+                </c:pt>
+                <c:pt idx="10">
+                  <c:v>30.35</c:v>
+                </c:pt>
+                <c:pt idx="11">
+                  <c:v>30.1</c:v>
+                </c:pt>
+                <c:pt idx="12">
+                  <c:v>29.56</c:v>
+                </c:pt>
+                <c:pt idx="13">
+                  <c:v>29.26</c:v>
+                </c:pt>
+                <c:pt idx="14">
+                  <c:v>26.24</c:v>
+                </c:pt>
+                <c:pt idx="15">
+                  <c:v>20.27</c:v>
+                </c:pt>
+                <c:pt idx="16">
+                  <c:v>12.25</c:v>
+                </c:pt>
+                <c:pt idx="17">
+                  <c:v>6.31</c:v>
+                </c:pt>
+                <c:pt idx="18">
+                  <c:v>2.71</c:v>
+                </c:pt>
+                <c:pt idx="19">
+                  <c:v>0.28999999999999998</c:v>
+                </c:pt>
+                <c:pt idx="20">
+                  <c:v>0</c:v>
+                </c:pt>
+              </c:numCache>
+            </c:numRef>
+          </c:yVal>
+          <c:smooth val="0"/>
+          <c:extLst>
+            <c:ext xmlns:c16="http://schemas.microsoft.com/office/drawing/2014/chart" uri="{C3380CC4-5D6E-409C-BE32-E72D297353CC}">
+              <c16:uniqueId val="{00000000-E404-3A44-8B42-3B146BFC9972}"/>
+            </c:ext>
+          </c:extLst>
+        </c:ser>
+        <c:ser>
+          <c:idx val="1"/>
+          <c:order val="1"/>
+          <c:tx>
+            <c:strRef>
+              <c:f>Sheet3!$F$1:$F$2</c:f>
+              <c:strCache>
+                <c:ptCount val="2"/>
+                <c:pt idx="0">
+                  <c:v>curtailed renewable</c:v>
+                </c:pt>
+                <c:pt idx="1">
+                  <c:v>battery-p</c:v>
+                </c:pt>
+              </c:strCache>
+            </c:strRef>
+          </c:tx>
+          <c:spPr>
+            <a:ln w="19050" cap="rnd">
+              <a:solidFill>
+                <a:schemeClr val="accent2"/>
+              </a:solidFill>
+              <a:round/>
+            </a:ln>
+            <a:effectLst/>
+          </c:spPr>
+          <c:marker>
+            <c:symbol val="circle"/>
+            <c:size val="5"/>
+            <c:spPr>
+              <a:solidFill>
+                <a:schemeClr val="accent2"/>
+              </a:solidFill>
+              <a:ln w="9525">
+                <a:solidFill>
+                  <a:schemeClr val="accent2"/>
+                </a:solidFill>
+              </a:ln>
+              <a:effectLst/>
+            </c:spPr>
+          </c:marker>
+          <c:xVal>
+            <c:numRef>
+              <c:f>Sheet3!$A$3:$A$23</c:f>
+              <c:numCache>
+                <c:formatCode>General</c:formatCode>
+                <c:ptCount val="21"/>
+                <c:pt idx="0">
+                  <c:v>0</c:v>
+                </c:pt>
+                <c:pt idx="1">
+                  <c:v>1</c:v>
+                </c:pt>
+                <c:pt idx="2">
+                  <c:v>2</c:v>
+                </c:pt>
+                <c:pt idx="3">
+                  <c:v>3</c:v>
+                </c:pt>
+                <c:pt idx="4">
+                  <c:v>4</c:v>
+                </c:pt>
+                <c:pt idx="5">
+                  <c:v>8</c:v>
+                </c:pt>
+                <c:pt idx="6">
+                  <c:v>16</c:v>
+                </c:pt>
+                <c:pt idx="7">
+                  <c:v>21</c:v>
+                </c:pt>
+                <c:pt idx="8">
+                  <c:v>22</c:v>
+                </c:pt>
+                <c:pt idx="9">
+                  <c:v>23</c:v>
+                </c:pt>
+                <c:pt idx="10">
+                  <c:v>24</c:v>
+                </c:pt>
+                <c:pt idx="11">
+                  <c:v>30</c:v>
+                </c:pt>
+                <c:pt idx="12">
+                  <c:v>33</c:v>
+                </c:pt>
+                <c:pt idx="13">
+                  <c:v>34</c:v>
+                </c:pt>
+                <c:pt idx="14">
+                  <c:v>40</c:v>
+                </c:pt>
+                <c:pt idx="15">
+                  <c:v>50</c:v>
+                </c:pt>
+                <c:pt idx="16">
+                  <c:v>100</c:v>
+                </c:pt>
+                <c:pt idx="17">
+                  <c:v>150</c:v>
+                </c:pt>
+                <c:pt idx="18">
+                  <c:v>175</c:v>
+                </c:pt>
+                <c:pt idx="19">
+                  <c:v>190</c:v>
+                </c:pt>
+                <c:pt idx="20">
+                  <c:v>194</c:v>
+                </c:pt>
+              </c:numCache>
+            </c:numRef>
+          </c:xVal>
+          <c:yVal>
+            <c:numRef>
+              <c:f>Sheet3!$F$3:$F$23</c:f>
+              <c:numCache>
+                <c:formatCode>General</c:formatCode>
+                <c:ptCount val="21"/>
+                <c:pt idx="0">
+                  <c:v>200.89</c:v>
+                </c:pt>
+                <c:pt idx="1">
+                  <c:v>179.1</c:v>
+                </c:pt>
+                <c:pt idx="2">
+                  <c:v>159.1</c:v>
+                </c:pt>
+                <c:pt idx="3">
+                  <c:v>139.1</c:v>
+                </c:pt>
+                <c:pt idx="4">
+                  <c:v>119.94</c:v>
+                </c:pt>
+                <c:pt idx="5">
+                  <c:v>63.36</c:v>
+                </c:pt>
+                <c:pt idx="6">
+                  <c:v>37.15</c:v>
+                </c:pt>
+                <c:pt idx="7">
+                  <c:v>32.15</c:v>
+                </c:pt>
+                <c:pt idx="8">
+                  <c:v>31.15</c:v>
+                </c:pt>
+                <c:pt idx="9">
+                  <c:v>30.83</c:v>
+                </c:pt>
+                <c:pt idx="10">
+                  <c:v>30.83</c:v>
+                </c:pt>
+                <c:pt idx="11">
+                  <c:v>30.83</c:v>
+                </c:pt>
+                <c:pt idx="12">
+                  <c:v>30.83</c:v>
+                </c:pt>
+                <c:pt idx="13">
+                  <c:v>30.83</c:v>
+                </c:pt>
+                <c:pt idx="14">
+                  <c:v>30.83</c:v>
+                </c:pt>
+                <c:pt idx="15">
+                  <c:v>30.83</c:v>
+                </c:pt>
+                <c:pt idx="16">
+                  <c:v>30.83</c:v>
+                </c:pt>
+                <c:pt idx="17">
+                  <c:v>30.83</c:v>
+                </c:pt>
+                <c:pt idx="18">
+                  <c:v>16.71</c:v>
+                </c:pt>
+                <c:pt idx="19">
+                  <c:v>1.71</c:v>
+                </c:pt>
+                <c:pt idx="20">
+                  <c:v>0</c:v>
+                </c:pt>
+              </c:numCache>
+            </c:numRef>
+          </c:yVal>
+          <c:smooth val="0"/>
+          <c:extLst>
+            <c:ext xmlns:c16="http://schemas.microsoft.com/office/drawing/2014/chart" uri="{C3380CC4-5D6E-409C-BE32-E72D297353CC}">
+              <c16:uniqueId val="{00000001-E404-3A44-8B42-3B146BFC9972}"/>
+            </c:ext>
+          </c:extLst>
+        </c:ser>
+        <c:ser>
+          <c:idx val="2"/>
+          <c:order val="2"/>
+          <c:tx>
+            <c:strRef>
+              <c:f>Sheet3!$G$1:$G$2</c:f>
+              <c:strCache>
+                <c:ptCount val="2"/>
+                <c:pt idx="0">
+                  <c:v>curtailed renewable</c:v>
+                </c:pt>
+                <c:pt idx="1">
+                  <c:v>utility-p</c:v>
+                </c:pt>
+              </c:strCache>
+            </c:strRef>
+          </c:tx>
+          <c:spPr>
+            <a:ln w="19050" cap="rnd">
+              <a:solidFill>
+                <a:schemeClr val="accent3"/>
+              </a:solidFill>
+              <a:round/>
+            </a:ln>
+            <a:effectLst/>
+          </c:spPr>
+          <c:marker>
+            <c:symbol val="circle"/>
+            <c:size val="5"/>
+            <c:spPr>
+              <a:solidFill>
+                <a:schemeClr val="accent3"/>
+              </a:solidFill>
+              <a:ln w="9525">
+                <a:solidFill>
+                  <a:schemeClr val="accent3"/>
+                </a:solidFill>
+              </a:ln>
+              <a:effectLst/>
+            </c:spPr>
+          </c:marker>
+          <c:xVal>
+            <c:numRef>
+              <c:f>Sheet3!$A$3:$A$23</c:f>
+              <c:numCache>
+                <c:formatCode>General</c:formatCode>
+                <c:ptCount val="21"/>
+                <c:pt idx="0">
+                  <c:v>0</c:v>
+                </c:pt>
+                <c:pt idx="1">
+                  <c:v>1</c:v>
+                </c:pt>
+                <c:pt idx="2">
+                  <c:v>2</c:v>
+                </c:pt>
+                <c:pt idx="3">
+                  <c:v>3</c:v>
+                </c:pt>
+                <c:pt idx="4">
+                  <c:v>4</c:v>
+                </c:pt>
+                <c:pt idx="5">
+                  <c:v>8</c:v>
+                </c:pt>
+                <c:pt idx="6">
+                  <c:v>16</c:v>
+                </c:pt>
+                <c:pt idx="7">
+                  <c:v>21</c:v>
+                </c:pt>
+                <c:pt idx="8">
+                  <c:v>22</c:v>
+                </c:pt>
+                <c:pt idx="9">
+                  <c:v>23</c:v>
+                </c:pt>
+                <c:pt idx="10">
+                  <c:v>24</c:v>
+                </c:pt>
+                <c:pt idx="11">
+                  <c:v>30</c:v>
+                </c:pt>
+                <c:pt idx="12">
+                  <c:v>33</c:v>
+                </c:pt>
+                <c:pt idx="13">
+                  <c:v>34</c:v>
+                </c:pt>
+                <c:pt idx="14">
+                  <c:v>40</c:v>
+                </c:pt>
+                <c:pt idx="15">
+                  <c:v>50</c:v>
+                </c:pt>
+                <c:pt idx="16">
+                  <c:v>100</c:v>
+                </c:pt>
+                <c:pt idx="17">
+                  <c:v>150</c:v>
+                </c:pt>
+                <c:pt idx="18">
+                  <c:v>175</c:v>
+                </c:pt>
+                <c:pt idx="19">
+                  <c:v>190</c:v>
+                </c:pt>
+                <c:pt idx="20">
+                  <c:v>194</c:v>
+                </c:pt>
+              </c:numCache>
+            </c:numRef>
+          </c:xVal>
+          <c:yVal>
+            <c:numRef>
+              <c:f>Sheet3!$G$3:$G$23</c:f>
+              <c:numCache>
+                <c:formatCode>General</c:formatCode>
+                <c:ptCount val="21"/>
+                <c:pt idx="0">
+                  <c:v>200.89</c:v>
+                </c:pt>
+                <c:pt idx="1">
+                  <c:v>188.13</c:v>
+                </c:pt>
+                <c:pt idx="2">
+                  <c:v>184.05</c:v>
+                </c:pt>
+                <c:pt idx="3">
+                  <c:v>182.48</c:v>
+                </c:pt>
+                <c:pt idx="4">
+                  <c:v>181.42</c:v>
+                </c:pt>
+                <c:pt idx="5">
+                  <c:v>177.48</c:v>
+                </c:pt>
+                <c:pt idx="6">
+                  <c:v>169.48</c:v>
+                </c:pt>
+                <c:pt idx="7">
+                  <c:v>164.48</c:v>
+                </c:pt>
+                <c:pt idx="8">
+                  <c:v>163.47999999999999</c:v>
+                </c:pt>
+                <c:pt idx="9">
+                  <c:v>162.47999999999999</c:v>
+                </c:pt>
+                <c:pt idx="10">
+                  <c:v>161.47999999999999</c:v>
+                </c:pt>
+                <c:pt idx="11">
+                  <c:v>155.47999999999999</c:v>
+                </c:pt>
+                <c:pt idx="12">
+                  <c:v>154.84</c:v>
+                </c:pt>
+                <c:pt idx="13">
+                  <c:v>154.84</c:v>
+                </c:pt>
+                <c:pt idx="14">
+                  <c:v>154.84</c:v>
+                </c:pt>
+                <c:pt idx="15">
+                  <c:v>154.84</c:v>
+                </c:pt>
+                <c:pt idx="16">
+                  <c:v>154.84</c:v>
+                </c:pt>
+                <c:pt idx="17">
+                  <c:v>154.84</c:v>
+                </c:pt>
+                <c:pt idx="18">
+                  <c:v>154.84</c:v>
+                </c:pt>
+                <c:pt idx="19">
+                  <c:v>154.84</c:v>
+                </c:pt>
+                <c:pt idx="20">
+                  <c:v>154.84</c:v>
+                </c:pt>
+              </c:numCache>
+            </c:numRef>
+          </c:yVal>
+          <c:smooth val="0"/>
+          <c:extLst>
+            <c:ext xmlns:c16="http://schemas.microsoft.com/office/drawing/2014/chart" uri="{C3380CC4-5D6E-409C-BE32-E72D297353CC}">
+              <c16:uniqueId val="{00000002-E404-3A44-8B42-3B146BFC9972}"/>
+            </c:ext>
+          </c:extLst>
+        </c:ser>
+        <c:dLbls>
+          <c:showLegendKey val="0"/>
+          <c:showVal val="0"/>
+          <c:showCatName val="0"/>
+          <c:showSerName val="0"/>
+          <c:showPercent val="0"/>
+          <c:showBubbleSize val="0"/>
+        </c:dLbls>
+        <c:axId val="275269439"/>
+        <c:axId val="275052367"/>
+      </c:scatterChart>
+      <c:valAx>
+        <c:axId val="275269439"/>
         <c:scaling>
           <c:orientation val="minMax"/>
         </c:scaling>
@@ -479,68 +1621,6 @@
             <a:effectLst/>
           </c:spPr>
         </c:majorGridlines>
-        <c:title>
-          <c:tx>
-            <c:rich>
-              <a:bodyPr rot="0" spcFirstLastPara="1" vertOverflow="ellipsis" vert="horz" wrap="square" anchor="ctr" anchorCtr="1"/>
-              <a:lstStyle/>
-              <a:p>
-                <a:pPr>
-                  <a:defRPr sz="1000" b="0" i="0" u="none" strike="noStrike" kern="1200" baseline="0">
-                    <a:solidFill>
-                      <a:schemeClr val="tx1">
-                        <a:lumMod val="65000"/>
-                        <a:lumOff val="35000"/>
-                      </a:schemeClr>
-                    </a:solidFill>
-                    <a:latin typeface="+mn-lt"/>
-                    <a:ea typeface="+mn-ea"/>
-                    <a:cs typeface="+mn-cs"/>
-                  </a:defRPr>
-                </a:pPr>
-                <a:r>
-                  <a:rPr lang="en-US" sz="1000" b="0" i="0" u="none" strike="noStrike" kern="1200" baseline="0">
-                    <a:solidFill>
-                      <a:sysClr val="windowText" lastClr="000000">
-                        <a:lumMod val="65000"/>
-                        <a:lumOff val="35000"/>
-                      </a:sysClr>
-                    </a:solidFill>
-                  </a:rPr>
-                  <a:t>batter capacity [GWh]</a:t>
-                </a:r>
-              </a:p>
-            </c:rich>
-          </c:tx>
-          <c:overlay val="0"/>
-          <c:spPr>
-            <a:noFill/>
-            <a:ln>
-              <a:noFill/>
-            </a:ln>
-            <a:effectLst/>
-          </c:spPr>
-          <c:txPr>
-            <a:bodyPr rot="0" spcFirstLastPara="1" vertOverflow="ellipsis" vert="horz" wrap="square" anchor="ctr" anchorCtr="1"/>
-            <a:lstStyle/>
-            <a:p>
-              <a:pPr>
-                <a:defRPr sz="1000" b="0" i="0" u="none" strike="noStrike" kern="1200" baseline="0">
-                  <a:solidFill>
-                    <a:schemeClr val="tx1">
-                      <a:lumMod val="65000"/>
-                      <a:lumOff val="35000"/>
-                    </a:schemeClr>
-                  </a:solidFill>
-                  <a:latin typeface="+mn-lt"/>
-                  <a:ea typeface="+mn-ea"/>
-                  <a:cs typeface="+mn-cs"/>
-                </a:defRPr>
-              </a:pPr>
-              <a:endParaRPr lang="en-US"/>
-            </a:p>
-          </c:txPr>
-        </c:title>
         <c:numFmt formatCode="General" sourceLinked="1"/>
         <c:majorTickMark val="none"/>
         <c:minorTickMark val="none"/>
@@ -578,12 +1658,12 @@
             <a:endParaRPr lang="en-US"/>
           </a:p>
         </c:txPr>
-        <c:crossAx val="639414640"/>
+        <c:crossAx val="275052367"/>
         <c:crosses val="autoZero"/>
         <c:crossBetween val="midCat"/>
       </c:valAx>
       <c:valAx>
-        <c:axId val="639414640"/>
+        <c:axId val="275052367"/>
         <c:scaling>
           <c:orientation val="minMax"/>
         </c:scaling>
@@ -603,68 +1683,6 @@
             <a:effectLst/>
           </c:spPr>
         </c:majorGridlines>
-        <c:title>
-          <c:tx>
-            <c:rich>
-              <a:bodyPr rot="-5400000" spcFirstLastPara="1" vertOverflow="ellipsis" vert="horz" wrap="square" anchor="ctr" anchorCtr="1"/>
-              <a:lstStyle/>
-              <a:p>
-                <a:pPr>
-                  <a:defRPr sz="1000" b="0" i="0" u="none" strike="noStrike" kern="1200" baseline="0">
-                    <a:solidFill>
-                      <a:schemeClr val="tx1">
-                        <a:lumMod val="65000"/>
-                        <a:lumOff val="35000"/>
-                      </a:schemeClr>
-                    </a:solidFill>
-                    <a:latin typeface="+mn-lt"/>
-                    <a:ea typeface="+mn-ea"/>
-                    <a:cs typeface="+mn-cs"/>
-                  </a:defRPr>
-                </a:pPr>
-                <a:r>
-                  <a:rPr lang="en-US" sz="1000" b="0" i="0" u="none" strike="noStrike" kern="1200" baseline="0">
-                    <a:solidFill>
-                      <a:sysClr val="windowText" lastClr="000000">
-                        <a:lumMod val="65000"/>
-                        <a:lumOff val="35000"/>
-                      </a:sysClr>
-                    </a:solidFill>
-                  </a:rPr>
-                  <a:t>curtailed load [GWh]</a:t>
-                </a:r>
-              </a:p>
-            </c:rich>
-          </c:tx>
-          <c:overlay val="0"/>
-          <c:spPr>
-            <a:noFill/>
-            <a:ln>
-              <a:noFill/>
-            </a:ln>
-            <a:effectLst/>
-          </c:spPr>
-          <c:txPr>
-            <a:bodyPr rot="-5400000" spcFirstLastPara="1" vertOverflow="ellipsis" vert="horz" wrap="square" anchor="ctr" anchorCtr="1"/>
-            <a:lstStyle/>
-            <a:p>
-              <a:pPr>
-                <a:defRPr sz="1000" b="0" i="0" u="none" strike="noStrike" kern="1200" baseline="0">
-                  <a:solidFill>
-                    <a:schemeClr val="tx1">
-                      <a:lumMod val="65000"/>
-                      <a:lumOff val="35000"/>
-                    </a:schemeClr>
-                  </a:solidFill>
-                  <a:latin typeface="+mn-lt"/>
-                  <a:ea typeface="+mn-ea"/>
-                  <a:cs typeface="+mn-cs"/>
-                </a:defRPr>
-              </a:pPr>
-              <a:endParaRPr lang="en-US"/>
-            </a:p>
-          </c:txPr>
-        </c:title>
         <c:numFmt formatCode="General" sourceLinked="1"/>
         <c:majorTickMark val="none"/>
         <c:minorTickMark val="none"/>
@@ -702,7 +1720,7 @@
             <a:endParaRPr lang="en-US"/>
           </a:p>
         </c:txPr>
-        <c:crossAx val="639412928"/>
+        <c:crossAx val="275269439"/>
         <c:crosses val="autoZero"/>
         <c:crossBetween val="midCat"/>
       </c:valAx>
@@ -715,7 +1733,7 @@
       </c:spPr>
     </c:plotArea>
     <c:legend>
-      <c:legendPos val="t"/>
+      <c:legendPos val="b"/>
       <c:overlay val="0"/>
       <c:spPr>
         <a:noFill/>
@@ -780,6 +1798,46 @@
 </file>
 
 <file path=ppt/charts/colors1.xml><?xml version="1.0" encoding="utf-8"?>
+<cs:colorStyle xmlns:cs="http://schemas.microsoft.com/office/drawing/2012/chartStyle" xmlns:a="http://schemas.openxmlformats.org/drawingml/2006/main" meth="cycle" id="10">
+  <a:schemeClr val="accent1"/>
+  <a:schemeClr val="accent2"/>
+  <a:schemeClr val="accent3"/>
+  <a:schemeClr val="accent4"/>
+  <a:schemeClr val="accent5"/>
+  <a:schemeClr val="accent6"/>
+  <cs:variation/>
+  <cs:variation>
+    <a:lumMod val="60000"/>
+  </cs:variation>
+  <cs:variation>
+    <a:lumMod val="80000"/>
+    <a:lumOff val="20000"/>
+  </cs:variation>
+  <cs:variation>
+    <a:lumMod val="80000"/>
+  </cs:variation>
+  <cs:variation>
+    <a:lumMod val="60000"/>
+    <a:lumOff val="40000"/>
+  </cs:variation>
+  <cs:variation>
+    <a:lumMod val="50000"/>
+  </cs:variation>
+  <cs:variation>
+    <a:lumMod val="70000"/>
+    <a:lumOff val="30000"/>
+  </cs:variation>
+  <cs:variation>
+    <a:lumMod val="70000"/>
+  </cs:variation>
+  <cs:variation>
+    <a:lumMod val="50000"/>
+    <a:lumOff val="50000"/>
+  </cs:variation>
+</cs:colorStyle>
+</file>
+
+<file path=ppt/charts/colors2.xml><?xml version="1.0" encoding="utf-8"?>
 <cs:colorStyle xmlns:cs="http://schemas.microsoft.com/office/drawing/2012/chartStyle" xmlns:a="http://schemas.openxmlformats.org/drawingml/2006/main" meth="cycle" id="10">
   <a:schemeClr val="accent1"/>
   <a:schemeClr val="accent2"/>
@@ -1335,6 +2393,522 @@
 </cs:chartStyle>
 </file>
 
+<file path=ppt/charts/style2.xml><?xml version="1.0" encoding="utf-8"?>
+<cs:chartStyle xmlns:cs="http://schemas.microsoft.com/office/drawing/2012/chartStyle" xmlns:a="http://schemas.openxmlformats.org/drawingml/2006/main" id="240">
+  <cs:axisTitle>
+    <cs:lnRef idx="0"/>
+    <cs:fillRef idx="0"/>
+    <cs:effectRef idx="0"/>
+    <cs:fontRef idx="minor">
+      <a:schemeClr val="tx1">
+        <a:lumMod val="65000"/>
+        <a:lumOff val="35000"/>
+      </a:schemeClr>
+    </cs:fontRef>
+    <cs:defRPr sz="1000" kern="1200"/>
+  </cs:axisTitle>
+  <cs:categoryAxis>
+    <cs:lnRef idx="0"/>
+    <cs:fillRef idx="0"/>
+    <cs:effectRef idx="0"/>
+    <cs:fontRef idx="minor">
+      <a:schemeClr val="tx1">
+        <a:lumMod val="65000"/>
+        <a:lumOff val="35000"/>
+      </a:schemeClr>
+    </cs:fontRef>
+    <cs:spPr>
+      <a:ln w="9525" cap="flat" cmpd="sng" algn="ctr">
+        <a:solidFill>
+          <a:schemeClr val="tx1">
+            <a:lumMod val="25000"/>
+            <a:lumOff val="75000"/>
+          </a:schemeClr>
+        </a:solidFill>
+        <a:round/>
+      </a:ln>
+    </cs:spPr>
+    <cs:defRPr sz="900" kern="1200"/>
+  </cs:categoryAxis>
+  <cs:chartArea mods="allowNoFillOverride allowNoLineOverride">
+    <cs:lnRef idx="0"/>
+    <cs:fillRef idx="0"/>
+    <cs:effectRef idx="0"/>
+    <cs:fontRef idx="minor">
+      <a:schemeClr val="tx1"/>
+    </cs:fontRef>
+    <cs:spPr>
+      <a:solidFill>
+        <a:schemeClr val="bg1"/>
+      </a:solidFill>
+      <a:ln w="9525" cap="flat" cmpd="sng" algn="ctr">
+        <a:solidFill>
+          <a:schemeClr val="tx1">
+            <a:lumMod val="15000"/>
+            <a:lumOff val="85000"/>
+          </a:schemeClr>
+        </a:solidFill>
+        <a:round/>
+      </a:ln>
+    </cs:spPr>
+    <cs:defRPr sz="1000" kern="1200"/>
+  </cs:chartArea>
+  <cs:dataLabel>
+    <cs:lnRef idx="0"/>
+    <cs:fillRef idx="0"/>
+    <cs:effectRef idx="0"/>
+    <cs:fontRef idx="minor">
+      <a:schemeClr val="tx1">
+        <a:lumMod val="75000"/>
+        <a:lumOff val="25000"/>
+      </a:schemeClr>
+    </cs:fontRef>
+    <cs:defRPr sz="900" kern="1200"/>
+  </cs:dataLabel>
+  <cs:dataLabelCallout>
+    <cs:lnRef idx="0"/>
+    <cs:fillRef idx="0"/>
+    <cs:effectRef idx="0"/>
+    <cs:fontRef idx="minor">
+      <a:schemeClr val="dk1">
+        <a:lumMod val="65000"/>
+        <a:lumOff val="35000"/>
+      </a:schemeClr>
+    </cs:fontRef>
+    <cs:spPr>
+      <a:solidFill>
+        <a:schemeClr val="lt1"/>
+      </a:solidFill>
+      <a:ln>
+        <a:solidFill>
+          <a:schemeClr val="dk1">
+            <a:lumMod val="25000"/>
+            <a:lumOff val="75000"/>
+          </a:schemeClr>
+        </a:solidFill>
+      </a:ln>
+    </cs:spPr>
+    <cs:defRPr sz="900" kern="1200"/>
+    <cs:bodyPr rot="0" spcFirstLastPara="1" vertOverflow="clip" horzOverflow="clip" vert="horz" wrap="square" lIns="36576" tIns="18288" rIns="36576" bIns="18288" anchor="ctr" anchorCtr="1">
+      <a:spAutoFit/>
+    </cs:bodyPr>
+  </cs:dataLabelCallout>
+  <cs:dataPoint>
+    <cs:lnRef idx="0"/>
+    <cs:fillRef idx="1">
+      <cs:styleClr val="auto"/>
+    </cs:fillRef>
+    <cs:effectRef idx="0"/>
+    <cs:fontRef idx="minor">
+      <a:schemeClr val="tx1"/>
+    </cs:fontRef>
+  </cs:dataPoint>
+  <cs:dataPoint3D>
+    <cs:lnRef idx="0"/>
+    <cs:fillRef idx="1">
+      <cs:styleClr val="auto"/>
+    </cs:fillRef>
+    <cs:effectRef idx="0"/>
+    <cs:fontRef idx="minor">
+      <a:schemeClr val="tx1"/>
+    </cs:fontRef>
+  </cs:dataPoint3D>
+  <cs:dataPointLine>
+    <cs:lnRef idx="0">
+      <cs:styleClr val="auto"/>
+    </cs:lnRef>
+    <cs:fillRef idx="1"/>
+    <cs:effectRef idx="0"/>
+    <cs:fontRef idx="minor">
+      <a:schemeClr val="tx1"/>
+    </cs:fontRef>
+    <cs:spPr>
+      <a:ln w="19050" cap="rnd">
+        <a:solidFill>
+          <a:schemeClr val="phClr"/>
+        </a:solidFill>
+        <a:round/>
+      </a:ln>
+    </cs:spPr>
+  </cs:dataPointLine>
+  <cs:dataPointMarker>
+    <cs:lnRef idx="0">
+      <cs:styleClr val="auto"/>
+    </cs:lnRef>
+    <cs:fillRef idx="1">
+      <cs:styleClr val="auto"/>
+    </cs:fillRef>
+    <cs:effectRef idx="0"/>
+    <cs:fontRef idx="minor">
+      <a:schemeClr val="tx1"/>
+    </cs:fontRef>
+    <cs:spPr>
+      <a:ln w="9525">
+        <a:solidFill>
+          <a:schemeClr val="phClr"/>
+        </a:solidFill>
+      </a:ln>
+    </cs:spPr>
+  </cs:dataPointMarker>
+  <cs:dataPointMarkerLayout symbol="circle" size="5"/>
+  <cs:dataPointWireframe>
+    <cs:lnRef idx="0">
+      <cs:styleClr val="auto"/>
+    </cs:lnRef>
+    <cs:fillRef idx="0"/>
+    <cs:effectRef idx="0"/>
+    <cs:fontRef idx="minor">
+      <a:schemeClr val="dk1"/>
+    </cs:fontRef>
+    <cs:spPr>
+      <a:ln w="9525" cap="rnd">
+        <a:solidFill>
+          <a:schemeClr val="phClr"/>
+        </a:solidFill>
+        <a:round/>
+      </a:ln>
+    </cs:spPr>
+  </cs:dataPointWireframe>
+  <cs:dataTable>
+    <cs:lnRef idx="0"/>
+    <cs:fillRef idx="0"/>
+    <cs:effectRef idx="0"/>
+    <cs:fontRef idx="minor">
+      <a:schemeClr val="tx1">
+        <a:lumMod val="65000"/>
+        <a:lumOff val="35000"/>
+      </a:schemeClr>
+    </cs:fontRef>
+    <cs:spPr>
+      <a:noFill/>
+      <a:ln w="9525" cap="flat" cmpd="sng" algn="ctr">
+        <a:solidFill>
+          <a:schemeClr val="tx1">
+            <a:lumMod val="15000"/>
+            <a:lumOff val="85000"/>
+          </a:schemeClr>
+        </a:solidFill>
+        <a:round/>
+      </a:ln>
+    </cs:spPr>
+    <cs:defRPr sz="900" kern="1200"/>
+  </cs:dataTable>
+  <cs:downBar>
+    <cs:lnRef idx="0"/>
+    <cs:fillRef idx="0"/>
+    <cs:effectRef idx="0"/>
+    <cs:fontRef idx="minor">
+      <a:schemeClr val="tx1"/>
+    </cs:fontRef>
+    <cs:spPr>
+      <a:solidFill>
+        <a:schemeClr val="dk1">
+          <a:lumMod val="75000"/>
+          <a:lumOff val="25000"/>
+        </a:schemeClr>
+      </a:solidFill>
+      <a:ln w="9525" cap="flat" cmpd="sng" algn="ctr">
+        <a:solidFill>
+          <a:schemeClr val="tx1">
+            <a:lumMod val="65000"/>
+            <a:lumOff val="35000"/>
+          </a:schemeClr>
+        </a:solidFill>
+        <a:round/>
+      </a:ln>
+    </cs:spPr>
+  </cs:downBar>
+  <cs:dropLine>
+    <cs:lnRef idx="0"/>
+    <cs:fillRef idx="0"/>
+    <cs:effectRef idx="0"/>
+    <cs:fontRef idx="minor">
+      <a:schemeClr val="tx1"/>
+    </cs:fontRef>
+    <cs:spPr>
+      <a:ln w="9525" cap="flat" cmpd="sng" algn="ctr">
+        <a:solidFill>
+          <a:schemeClr val="tx1">
+            <a:lumMod val="35000"/>
+            <a:lumOff val="65000"/>
+          </a:schemeClr>
+        </a:solidFill>
+        <a:round/>
+      </a:ln>
+    </cs:spPr>
+  </cs:dropLine>
+  <cs:errorBar>
+    <cs:lnRef idx="0"/>
+    <cs:fillRef idx="0"/>
+    <cs:effectRef idx="0"/>
+    <cs:fontRef idx="minor">
+      <a:schemeClr val="tx1"/>
+    </cs:fontRef>
+    <cs:spPr>
+      <a:ln w="9525" cap="flat" cmpd="sng" algn="ctr">
+        <a:solidFill>
+          <a:schemeClr val="tx1">
+            <a:lumMod val="65000"/>
+            <a:lumOff val="35000"/>
+          </a:schemeClr>
+        </a:solidFill>
+        <a:round/>
+      </a:ln>
+    </cs:spPr>
+  </cs:errorBar>
+  <cs:floor>
+    <cs:lnRef idx="0"/>
+    <cs:fillRef idx="0"/>
+    <cs:effectRef idx="0"/>
+    <cs:fontRef idx="minor">
+      <a:schemeClr val="tx1"/>
+    </cs:fontRef>
+    <cs:spPr>
+      <a:noFill/>
+      <a:ln>
+        <a:noFill/>
+      </a:ln>
+    </cs:spPr>
+  </cs:floor>
+  <cs:gridlineMajor>
+    <cs:lnRef idx="0"/>
+    <cs:fillRef idx="0"/>
+    <cs:effectRef idx="0"/>
+    <cs:fontRef idx="minor">
+      <a:schemeClr val="tx1"/>
+    </cs:fontRef>
+    <cs:spPr>
+      <a:ln w="9525" cap="flat" cmpd="sng" algn="ctr">
+        <a:solidFill>
+          <a:schemeClr val="tx1">
+            <a:lumMod val="15000"/>
+            <a:lumOff val="85000"/>
+          </a:schemeClr>
+        </a:solidFill>
+        <a:round/>
+      </a:ln>
+    </cs:spPr>
+  </cs:gridlineMajor>
+  <cs:gridlineMinor>
+    <cs:lnRef idx="0"/>
+    <cs:fillRef idx="0"/>
+    <cs:effectRef idx="0"/>
+    <cs:fontRef idx="minor">
+      <a:schemeClr val="tx1"/>
+    </cs:fontRef>
+    <cs:spPr>
+      <a:ln w="9525" cap="flat" cmpd="sng" algn="ctr">
+        <a:solidFill>
+          <a:schemeClr val="tx1">
+            <a:lumMod val="5000"/>
+            <a:lumOff val="95000"/>
+          </a:schemeClr>
+        </a:solidFill>
+        <a:round/>
+      </a:ln>
+    </cs:spPr>
+  </cs:gridlineMinor>
+  <cs:hiLoLine>
+    <cs:lnRef idx="0"/>
+    <cs:fillRef idx="0"/>
+    <cs:effectRef idx="0"/>
+    <cs:fontRef idx="minor">
+      <a:schemeClr val="tx1"/>
+    </cs:fontRef>
+    <cs:spPr>
+      <a:ln w="9525" cap="flat" cmpd="sng" algn="ctr">
+        <a:solidFill>
+          <a:schemeClr val="tx1">
+            <a:lumMod val="50000"/>
+            <a:lumOff val="50000"/>
+          </a:schemeClr>
+        </a:solidFill>
+        <a:round/>
+      </a:ln>
+    </cs:spPr>
+  </cs:hiLoLine>
+  <cs:leaderLine>
+    <cs:lnRef idx="0"/>
+    <cs:fillRef idx="0"/>
+    <cs:effectRef idx="0"/>
+    <cs:fontRef idx="minor">
+      <a:schemeClr val="tx1"/>
+    </cs:fontRef>
+    <cs:spPr>
+      <a:ln w="9525" cap="flat" cmpd="sng" algn="ctr">
+        <a:solidFill>
+          <a:schemeClr val="tx1">
+            <a:lumMod val="35000"/>
+            <a:lumOff val="65000"/>
+          </a:schemeClr>
+        </a:solidFill>
+        <a:round/>
+      </a:ln>
+    </cs:spPr>
+  </cs:leaderLine>
+  <cs:legend>
+    <cs:lnRef idx="0"/>
+    <cs:fillRef idx="0"/>
+    <cs:effectRef idx="0"/>
+    <cs:fontRef idx="minor">
+      <a:schemeClr val="tx1">
+        <a:lumMod val="65000"/>
+        <a:lumOff val="35000"/>
+      </a:schemeClr>
+    </cs:fontRef>
+    <cs:defRPr sz="900" kern="1200"/>
+  </cs:legend>
+  <cs:plotArea mods="allowNoFillOverride allowNoLineOverride">
+    <cs:lnRef idx="0"/>
+    <cs:fillRef idx="0"/>
+    <cs:effectRef idx="0"/>
+    <cs:fontRef idx="minor">
+      <a:schemeClr val="tx1"/>
+    </cs:fontRef>
+  </cs:plotArea>
+  <cs:plotArea3D mods="allowNoFillOverride allowNoLineOverride">
+    <cs:lnRef idx="0"/>
+    <cs:fillRef idx="0"/>
+    <cs:effectRef idx="0"/>
+    <cs:fontRef idx="minor">
+      <a:schemeClr val="tx1"/>
+    </cs:fontRef>
+  </cs:plotArea3D>
+  <cs:seriesAxis>
+    <cs:lnRef idx="0"/>
+    <cs:fillRef idx="0"/>
+    <cs:effectRef idx="0"/>
+    <cs:fontRef idx="minor">
+      <a:schemeClr val="tx1">
+        <a:lumMod val="65000"/>
+        <a:lumOff val="35000"/>
+      </a:schemeClr>
+    </cs:fontRef>
+    <cs:defRPr sz="900" kern="1200"/>
+  </cs:seriesAxis>
+  <cs:seriesLine>
+    <cs:lnRef idx="0"/>
+    <cs:fillRef idx="0"/>
+    <cs:effectRef idx="0"/>
+    <cs:fontRef idx="minor">
+      <a:schemeClr val="tx1"/>
+    </cs:fontRef>
+    <cs:spPr>
+      <a:ln w="9525" cap="flat" cmpd="sng" algn="ctr">
+        <a:solidFill>
+          <a:schemeClr val="tx1">
+            <a:lumMod val="35000"/>
+            <a:lumOff val="65000"/>
+          </a:schemeClr>
+        </a:solidFill>
+        <a:round/>
+      </a:ln>
+    </cs:spPr>
+  </cs:seriesLine>
+  <cs:title>
+    <cs:lnRef idx="0"/>
+    <cs:fillRef idx="0"/>
+    <cs:effectRef idx="0"/>
+    <cs:fontRef idx="minor">
+      <a:schemeClr val="tx1">
+        <a:lumMod val="65000"/>
+        <a:lumOff val="35000"/>
+      </a:schemeClr>
+    </cs:fontRef>
+    <cs:defRPr sz="1400" b="0" kern="1200" spc="0" baseline="0"/>
+  </cs:title>
+  <cs:trendline>
+    <cs:lnRef idx="0">
+      <cs:styleClr val="auto"/>
+    </cs:lnRef>
+    <cs:fillRef idx="0"/>
+    <cs:effectRef idx="0"/>
+    <cs:fontRef idx="minor">
+      <a:schemeClr val="tx1"/>
+    </cs:fontRef>
+    <cs:spPr>
+      <a:ln w="19050" cap="rnd">
+        <a:solidFill>
+          <a:schemeClr val="phClr"/>
+        </a:solidFill>
+        <a:prstDash val="sysDot"/>
+      </a:ln>
+    </cs:spPr>
+  </cs:trendline>
+  <cs:trendlineLabel>
+    <cs:lnRef idx="0"/>
+    <cs:fillRef idx="0"/>
+    <cs:effectRef idx="0"/>
+    <cs:fontRef idx="minor">
+      <a:schemeClr val="tx1">
+        <a:lumMod val="65000"/>
+        <a:lumOff val="35000"/>
+      </a:schemeClr>
+    </cs:fontRef>
+    <cs:defRPr sz="900" kern="1200"/>
+  </cs:trendlineLabel>
+  <cs:upBar>
+    <cs:lnRef idx="0"/>
+    <cs:fillRef idx="0"/>
+    <cs:effectRef idx="0"/>
+    <cs:fontRef idx="minor">
+      <a:schemeClr val="tx1"/>
+    </cs:fontRef>
+    <cs:spPr>
+      <a:solidFill>
+        <a:schemeClr val="lt1"/>
+      </a:solidFill>
+      <a:ln w="9525" cap="flat" cmpd="sng" algn="ctr">
+        <a:solidFill>
+          <a:schemeClr val="tx1">
+            <a:lumMod val="65000"/>
+            <a:lumOff val="35000"/>
+          </a:schemeClr>
+        </a:solidFill>
+        <a:round/>
+      </a:ln>
+    </cs:spPr>
+  </cs:upBar>
+  <cs:valueAxis>
+    <cs:lnRef idx="0"/>
+    <cs:fillRef idx="0"/>
+    <cs:effectRef idx="0"/>
+    <cs:fontRef idx="minor">
+      <a:schemeClr val="tx1">
+        <a:lumMod val="65000"/>
+        <a:lumOff val="35000"/>
+      </a:schemeClr>
+    </cs:fontRef>
+    <cs:spPr>
+      <a:ln w="9525" cap="flat" cmpd="sng" algn="ctr">
+        <a:solidFill>
+          <a:schemeClr val="tx1">
+            <a:lumMod val="25000"/>
+            <a:lumOff val="75000"/>
+          </a:schemeClr>
+        </a:solidFill>
+        <a:round/>
+      </a:ln>
+    </cs:spPr>
+    <cs:defRPr sz="900" kern="1200"/>
+  </cs:valueAxis>
+  <cs:wall>
+    <cs:lnRef idx="0"/>
+    <cs:fillRef idx="0"/>
+    <cs:effectRef idx="0"/>
+    <cs:fontRef idx="minor">
+      <a:schemeClr val="tx1"/>
+    </cs:fontRef>
+    <cs:spPr>
+      <a:noFill/>
+      <a:ln>
+        <a:noFill/>
+      </a:ln>
+    </cs:spPr>
+  </cs:wall>
+</cs:chartStyle>
+</file>
+
 <file path=ppt/slideLayouts/slideLayout1.xml><?xml version="1.0" encoding="utf-8"?>
 <p:sldLayout xmlns:a="http://schemas.openxmlformats.org/drawingml/2006/main" xmlns:r="http://schemas.openxmlformats.org/officeDocument/2006/relationships" xmlns:p="http://schemas.openxmlformats.org/presentationml/2006/main" type="title" preserve="1">
   <p:cSld name="Title Slide">
@@ -1482,7 +3056,7 @@
           <a:p>
             <a:fld id="{35A8F8AD-C0B6-E348-9BBC-0EFFBCEF2F99}" type="datetimeFigureOut">
               <a:rPr lang="en-US" smtClean="0"/>
-              <a:t>7/18/25</a:t>
+              <a:t>7/21/25</a:t>
             </a:fld>
             <a:endParaRPr lang="en-US"/>
           </a:p>
@@ -1680,7 +3254,7 @@
           <a:p>
             <a:fld id="{35A8F8AD-C0B6-E348-9BBC-0EFFBCEF2F99}" type="datetimeFigureOut">
               <a:rPr lang="en-US" smtClean="0"/>
-              <a:t>7/18/25</a:t>
+              <a:t>7/21/25</a:t>
             </a:fld>
             <a:endParaRPr lang="en-US"/>
           </a:p>
@@ -1888,7 +3462,7 @@
           <a:p>
             <a:fld id="{35A8F8AD-C0B6-E348-9BBC-0EFFBCEF2F99}" type="datetimeFigureOut">
               <a:rPr lang="en-US" smtClean="0"/>
-              <a:t>7/18/25</a:t>
+              <a:t>7/21/25</a:t>
             </a:fld>
             <a:endParaRPr lang="en-US"/>
           </a:p>
@@ -2086,7 +3660,7 @@
           <a:p>
             <a:fld id="{35A8F8AD-C0B6-E348-9BBC-0EFFBCEF2F99}" type="datetimeFigureOut">
               <a:rPr lang="en-US" smtClean="0"/>
-              <a:t>7/18/25</a:t>
+              <a:t>7/21/25</a:t>
             </a:fld>
             <a:endParaRPr lang="en-US"/>
           </a:p>
@@ -2361,7 +3935,7 @@
           <a:p>
             <a:fld id="{35A8F8AD-C0B6-E348-9BBC-0EFFBCEF2F99}" type="datetimeFigureOut">
               <a:rPr lang="en-US" smtClean="0"/>
-              <a:t>7/18/25</a:t>
+              <a:t>7/21/25</a:t>
             </a:fld>
             <a:endParaRPr lang="en-US"/>
           </a:p>
@@ -2626,7 +4200,7 @@
           <a:p>
             <a:fld id="{35A8F8AD-C0B6-E348-9BBC-0EFFBCEF2F99}" type="datetimeFigureOut">
               <a:rPr lang="en-US" smtClean="0"/>
-              <a:t>7/18/25</a:t>
+              <a:t>7/21/25</a:t>
             </a:fld>
             <a:endParaRPr lang="en-US"/>
           </a:p>
@@ -3038,7 +4612,7 @@
           <a:p>
             <a:fld id="{35A8F8AD-C0B6-E348-9BBC-0EFFBCEF2F99}" type="datetimeFigureOut">
               <a:rPr lang="en-US" smtClean="0"/>
-              <a:t>7/18/25</a:t>
+              <a:t>7/21/25</a:t>
             </a:fld>
             <a:endParaRPr lang="en-US"/>
           </a:p>
@@ -3179,7 +4753,7 @@
           <a:p>
             <a:fld id="{35A8F8AD-C0B6-E348-9BBC-0EFFBCEF2F99}" type="datetimeFigureOut">
               <a:rPr lang="en-US" smtClean="0"/>
-              <a:t>7/18/25</a:t>
+              <a:t>7/21/25</a:t>
             </a:fld>
             <a:endParaRPr lang="en-US"/>
           </a:p>
@@ -3292,7 +4866,7 @@
           <a:p>
             <a:fld id="{35A8F8AD-C0B6-E348-9BBC-0EFFBCEF2F99}" type="datetimeFigureOut">
               <a:rPr lang="en-US" smtClean="0"/>
-              <a:t>7/18/25</a:t>
+              <a:t>7/21/25</a:t>
             </a:fld>
             <a:endParaRPr lang="en-US"/>
           </a:p>
@@ -3603,7 +5177,7 @@
           <a:p>
             <a:fld id="{35A8F8AD-C0B6-E348-9BBC-0EFFBCEF2F99}" type="datetimeFigureOut">
               <a:rPr lang="en-US" smtClean="0"/>
-              <a:t>7/18/25</a:t>
+              <a:t>7/21/25</a:t>
             </a:fld>
             <a:endParaRPr lang="en-US"/>
           </a:p>
@@ -3891,7 +5465,7 @@
           <a:p>
             <a:fld id="{35A8F8AD-C0B6-E348-9BBC-0EFFBCEF2F99}" type="datetimeFigureOut">
               <a:rPr lang="en-US" smtClean="0"/>
-              <a:t>7/18/25</a:t>
+              <a:t>7/21/25</a:t>
             </a:fld>
             <a:endParaRPr lang="en-US"/>
           </a:p>
@@ -4132,7 +5706,7 @@
           <a:p>
             <a:fld id="{35A8F8AD-C0B6-E348-9BBC-0EFFBCEF2F99}" type="datetimeFigureOut">
               <a:rPr lang="en-US" smtClean="0"/>
-              <a:t>7/18/25</a:t>
+              <a:t>7/21/25</a:t>
             </a:fld>
             <a:endParaRPr lang="en-US"/>
           </a:p>
@@ -4593,9 +6167,16 @@
             <p:ph idx="1"/>
           </p:nvPr>
         </p:nvSpPr>
-        <p:spPr/>
-        <p:txBody>
-          <a:bodyPr/>
+        <p:spPr>
+          <a:xfrm>
+            <a:off x="838200" y="1825625"/>
+            <a:ext cx="6551831" cy="4351338"/>
+          </a:xfrm>
+        </p:spPr>
+        <p:txBody>
+          <a:bodyPr>
+            <a:normAutofit lnSpcReduction="10000"/>
+          </a:bodyPr>
           <a:lstStyle/>
           <a:p>
             <a:r>
@@ -4633,6 +6214,15 @@
             <a:r>
               <a:rPr lang="en-US" dirty="0"/>
               <a:t>After adding event: 32.52 GWh</a:t>
+            </a:r>
+          </a:p>
+          <a:p>
+            <a:endParaRPr lang="en-US" dirty="0"/>
+          </a:p>
+          <a:p>
+            <a:r>
+              <a:rPr lang="en-US" dirty="0"/>
+              <a:t>Prescient, one-shot battery, generators, and renewables scheduling</a:t>
             </a:r>
           </a:p>
           <a:p>
@@ -4824,7 +6414,7 @@
           <p:cNvPr id="2" name="Title 1">
             <a:extLst>
               <a:ext uri="{FF2B5EF4-FFF2-40B4-BE49-F238E27FC236}">
-                <a16:creationId xmlns:a16="http://schemas.microsoft.com/office/drawing/2014/main" id="{5E8A3B85-BA4F-D6A0-2843-1AE6B95E711A}"/>
+                <a16:creationId xmlns:a16="http://schemas.microsoft.com/office/drawing/2014/main" id="{DA360B5F-B854-D004-25A8-881B7E6A95A5}"/>
               </a:ext>
             </a:extLst>
           </p:cNvPr>
@@ -4842,75 +6432,146 @@
           <a:p>
             <a:r>
               <a:rPr lang="en-US" dirty="0"/>
-              <a:t>Capacity needed to cover event</a:t>
-            </a:r>
-          </a:p>
-        </p:txBody>
-      </p:sp>
-      <p:sp>
-        <p:nvSpPr>
-          <p:cNvPr id="3" name="Content Placeholder 2">
-            <a:extLst>
-              <a:ext uri="{FF2B5EF4-FFF2-40B4-BE49-F238E27FC236}">
-                <a16:creationId xmlns:a16="http://schemas.microsoft.com/office/drawing/2014/main" id="{21A1B3C1-E07E-613B-3395-9A3D39EA573C}"/>
-              </a:ext>
-            </a:extLst>
-          </p:cNvPr>
-          <p:cNvSpPr>
-            <a:spLocks noGrp="1"/>
-          </p:cNvSpPr>
+              <a:t>Load, renewables, and shortfall with and without synthetic heatwave/smoke event</a:t>
+            </a:r>
+          </a:p>
+        </p:txBody>
+      </p:sp>
+      <p:pic>
+        <p:nvPicPr>
+          <p:cNvPr id="1026" name="Picture 2">
+            <a:extLst>
+              <a:ext uri="{FF2B5EF4-FFF2-40B4-BE49-F238E27FC236}">
+                <a16:creationId xmlns:a16="http://schemas.microsoft.com/office/drawing/2014/main" id="{3997D4D0-7775-68F6-C43C-4BDBD332E2CA}"/>
+              </a:ext>
+            </a:extLst>
+          </p:cNvPr>
+          <p:cNvPicPr>
+            <a:picLocks noGrp="1" noChangeAspect="1" noChangeArrowheads="1"/>
+          </p:cNvPicPr>
           <p:nvPr>
             <p:ph idx="1"/>
           </p:nvPr>
+        </p:nvPicPr>
+        <p:blipFill>
+          <a:blip r:embed="rId2">
+            <a:extLst>
+              <a:ext uri="{28A0092B-C50C-407E-A947-70E740481C1C}">
+                <a14:useLocalDpi xmlns:a14="http://schemas.microsoft.com/office/drawing/2010/main" val="0"/>
+              </a:ext>
+            </a:extLst>
+          </a:blip>
+          <a:srcRect/>
+          <a:stretch>
+            <a:fillRect/>
+          </a:stretch>
+        </p:blipFill>
+        <p:spPr bwMode="auto">
+          <a:xfrm>
+            <a:off x="5958296" y="2788989"/>
+            <a:ext cx="5943600" cy="2938409"/>
+          </a:xfrm>
+          <a:prstGeom prst="rect">
+            <a:avLst/>
+          </a:prstGeom>
+          <a:noFill/>
+          <a:extLst>
+            <a:ext uri="{909E8E84-426E-40DD-AFC4-6F175D3DCCD1}">
+              <a14:hiddenFill xmlns:a14="http://schemas.microsoft.com/office/drawing/2010/main">
+                <a:solidFill>
+                  <a:srgbClr val="FFFFFF"/>
+                </a:solidFill>
+              </a14:hiddenFill>
+            </a:ext>
+          </a:extLst>
+        </p:spPr>
+      </p:pic>
+      <p:pic>
+        <p:nvPicPr>
+          <p:cNvPr id="1028" name="Picture 4">
+            <a:extLst>
+              <a:ext uri="{FF2B5EF4-FFF2-40B4-BE49-F238E27FC236}">
+                <a16:creationId xmlns:a16="http://schemas.microsoft.com/office/drawing/2014/main" id="{64E5E98D-8C9B-EC23-D2C5-97B615A9A0B1}"/>
+              </a:ext>
+            </a:extLst>
+          </p:cNvPr>
+          <p:cNvPicPr>
+            <a:picLocks noChangeAspect="1" noChangeArrowheads="1"/>
+          </p:cNvPicPr>
+          <p:nvPr/>
+        </p:nvPicPr>
+        <p:blipFill>
+          <a:blip r:embed="rId3">
+            <a:extLst>
+              <a:ext uri="{28A0092B-C50C-407E-A947-70E740481C1C}">
+                <a14:useLocalDpi xmlns:a14="http://schemas.microsoft.com/office/drawing/2010/main" val="0"/>
+              </a:ext>
+            </a:extLst>
+          </a:blip>
+          <a:srcRect/>
+          <a:stretch>
+            <a:fillRect/>
+          </a:stretch>
+        </p:blipFill>
+        <p:spPr bwMode="auto">
+          <a:xfrm>
+            <a:off x="16707" y="2788989"/>
+            <a:ext cx="5941589" cy="2943717"/>
+          </a:xfrm>
+          <a:prstGeom prst="rect">
+            <a:avLst/>
+          </a:prstGeom>
+          <a:noFill/>
+          <a:extLst>
+            <a:ext uri="{909E8E84-426E-40DD-AFC4-6F175D3DCCD1}">
+              <a14:hiddenFill xmlns:a14="http://schemas.microsoft.com/office/drawing/2010/main">
+                <a:solidFill>
+                  <a:srgbClr val="FFFFFF"/>
+                </a:solidFill>
+              </a14:hiddenFill>
+            </a:ext>
+          </a:extLst>
+        </p:spPr>
+      </p:pic>
+      <p:sp>
+        <p:nvSpPr>
+          <p:cNvPr id="4" name="TextBox 3">
+            <a:extLst>
+              <a:ext uri="{FF2B5EF4-FFF2-40B4-BE49-F238E27FC236}">
+                <a16:creationId xmlns:a16="http://schemas.microsoft.com/office/drawing/2014/main" id="{1C9A8E6E-1556-189B-2BA3-E9F62D5117A7}"/>
+              </a:ext>
+            </a:extLst>
+          </p:cNvPr>
+          <p:cNvSpPr txBox="1"/>
+          <p:nvPr/>
         </p:nvSpPr>
         <p:spPr>
           <a:xfrm>
-            <a:off x="838200" y="1825625"/>
-            <a:ext cx="4724400" cy="4351338"/>
+            <a:off x="2480901" y="6123543"/>
+            <a:ext cx="6954789" cy="369332"/>
           </a:xfrm>
+          <a:prstGeom prst="rect">
+            <a:avLst/>
+          </a:prstGeom>
+          <a:noFill/>
         </p:spPr>
         <p:txBody>
-          <a:bodyPr/>
-          <a:lstStyle/>
-          <a:p>
-            <a:endParaRPr lang="en-US" dirty="0"/>
-          </a:p>
-        </p:txBody>
-      </p:sp>
-      <p:graphicFrame>
-        <p:nvGraphicFramePr>
-          <p:cNvPr id="7" name="Chart 6">
-            <a:extLst>
-              <a:ext uri="{FF2B5EF4-FFF2-40B4-BE49-F238E27FC236}">
-                <a16:creationId xmlns:a16="http://schemas.microsoft.com/office/drawing/2014/main" id="{BA8B0CAE-C93D-CFF2-66CD-4625650ADB1C}"/>
-              </a:ext>
-            </a:extLst>
-          </p:cNvPr>
-          <p:cNvGraphicFramePr>
-            <a:graphicFrameLocks/>
-          </p:cNvGraphicFramePr>
-          <p:nvPr>
-            <p:extLst>
-              <p:ext uri="{D42A27DB-BD31-4B8C-83A1-F6EECF244321}">
-                <p14:modId xmlns:p14="http://schemas.microsoft.com/office/powerpoint/2010/main" val="165890150"/>
-              </p:ext>
-            </p:extLst>
-          </p:nvPr>
-        </p:nvGraphicFramePr>
-        <p:xfrm>
-          <a:off x="6516624" y="1825624"/>
-          <a:ext cx="4572000" cy="4351337"/>
-        </p:xfrm>
-        <a:graphic>
-          <a:graphicData uri="http://schemas.openxmlformats.org/drawingml/2006/chart">
-            <c:chart xmlns:c="http://schemas.openxmlformats.org/drawingml/2006/chart" xmlns:r="http://schemas.openxmlformats.org/officeDocument/2006/relationships" r:id="rId2"/>
-          </a:graphicData>
-        </a:graphic>
-      </p:graphicFrame>
+          <a:bodyPr wrap="none" rtlCol="0">
+            <a:spAutoFit/>
+          </a:bodyPr>
+          <a:lstStyle/>
+          <a:p>
+            <a:r>
+              <a:rPr lang="en-US" dirty="0"/>
+              <a:t>Shortfall is the positive part of load minus max fossil and renewables</a:t>
+            </a:r>
+          </a:p>
+        </p:txBody>
+      </p:sp>
     </p:spTree>
     <p:extLst>
       <p:ext uri="{BB962C8B-B14F-4D97-AF65-F5344CB8AC3E}">
-        <p14:creationId xmlns:p14="http://schemas.microsoft.com/office/powerpoint/2010/main" val="3649617980"/>
+        <p14:creationId xmlns:p14="http://schemas.microsoft.com/office/powerpoint/2010/main" val="3245403756"/>
       </p:ext>
     </p:extLst>
   </p:cSld>
@@ -4953,14 +6614,21 @@
             <p:ph type="title"/>
           </p:nvPr>
         </p:nvSpPr>
-        <p:spPr/>
-        <p:txBody>
-          <a:bodyPr/>
-          <a:lstStyle/>
-          <a:p>
-            <a:r>
-              <a:rPr lang="en-US" dirty="0"/>
-              <a:t>Example trace</a:t>
+        <p:spPr>
+          <a:xfrm>
+            <a:off x="838200" y="365125"/>
+            <a:ext cx="3906795" cy="1325563"/>
+          </a:xfrm>
+        </p:spPr>
+        <p:txBody>
+          <a:bodyPr>
+            <a:noAutofit/>
+          </a:bodyPr>
+          <a:lstStyle/>
+          <a:p>
+            <a:r>
+              <a:rPr lang="en-US" sz="3200" dirty="0"/>
+              <a:t>Optimal battery control: Example trace</a:t>
             </a:r>
           </a:p>
         </p:txBody>
@@ -5554,34 +7222,6 @@
       </p:grpSpPr>
       <p:sp>
         <p:nvSpPr>
-          <p:cNvPr id="2" name="Title 1">
-            <a:extLst>
-              <a:ext uri="{FF2B5EF4-FFF2-40B4-BE49-F238E27FC236}">
-                <a16:creationId xmlns:a16="http://schemas.microsoft.com/office/drawing/2014/main" id="{12E19F97-AFA6-A60C-2AD7-29F6F6DCC9C9}"/>
-              </a:ext>
-            </a:extLst>
-          </p:cNvPr>
-          <p:cNvSpPr>
-            <a:spLocks noGrp="1"/>
-          </p:cNvSpPr>
-          <p:nvPr>
-            <p:ph type="title"/>
-          </p:nvPr>
-        </p:nvSpPr>
-        <p:spPr/>
-        <p:txBody>
-          <a:bodyPr/>
-          <a:lstStyle/>
-          <a:p>
-            <a:r>
-              <a:rPr lang="en-US" dirty="0"/>
-              <a:t>Example trace</a:t>
-            </a:r>
-          </a:p>
-        </p:txBody>
-      </p:sp>
-      <p:sp>
-        <p:nvSpPr>
           <p:cNvPr id="3" name="Content Placeholder 2">
             <a:extLst>
               <a:ext uri="{FF2B5EF4-FFF2-40B4-BE49-F238E27FC236}">
@@ -6128,6 +7768,41 @@
           <a:p>
             <a:pPr algn="ctr"/>
             <a:endParaRPr lang="en-US"/>
+          </a:p>
+        </p:txBody>
+      </p:sp>
+      <p:sp>
+        <p:nvSpPr>
+          <p:cNvPr id="18" name="Title 1">
+            <a:extLst>
+              <a:ext uri="{FF2B5EF4-FFF2-40B4-BE49-F238E27FC236}">
+                <a16:creationId xmlns:a16="http://schemas.microsoft.com/office/drawing/2014/main" id="{C11E8A0D-BD3E-CEDF-519E-36B688F67568}"/>
+              </a:ext>
+            </a:extLst>
+          </p:cNvPr>
+          <p:cNvSpPr>
+            <a:spLocks noGrp="1"/>
+          </p:cNvSpPr>
+          <p:nvPr>
+            <p:ph type="title"/>
+          </p:nvPr>
+        </p:nvSpPr>
+        <p:spPr>
+          <a:xfrm>
+            <a:off x="838200" y="365125"/>
+            <a:ext cx="3906795" cy="1325563"/>
+          </a:xfrm>
+        </p:spPr>
+        <p:txBody>
+          <a:bodyPr>
+            <a:noAutofit/>
+          </a:bodyPr>
+          <a:lstStyle/>
+          <a:p>
+            <a:r>
+              <a:rPr lang="en-US" sz="3200" dirty="0"/>
+              <a:t>Optimal battery control: Example trace</a:t>
+            </a:r>
           </a:p>
         </p:txBody>
       </p:sp>
@@ -6169,34 +7844,6 @@
       </p:grpSpPr>
       <p:sp>
         <p:nvSpPr>
-          <p:cNvPr id="2" name="Title 1">
-            <a:extLst>
-              <a:ext uri="{FF2B5EF4-FFF2-40B4-BE49-F238E27FC236}">
-                <a16:creationId xmlns:a16="http://schemas.microsoft.com/office/drawing/2014/main" id="{A9581748-66FB-BCF6-A1E0-9C807842E791}"/>
-              </a:ext>
-            </a:extLst>
-          </p:cNvPr>
-          <p:cNvSpPr>
-            <a:spLocks noGrp="1"/>
-          </p:cNvSpPr>
-          <p:nvPr>
-            <p:ph type="title"/>
-          </p:nvPr>
-        </p:nvSpPr>
-        <p:spPr/>
-        <p:txBody>
-          <a:bodyPr/>
-          <a:lstStyle/>
-          <a:p>
-            <a:r>
-              <a:rPr lang="en-US" dirty="0"/>
-              <a:t>Example trace</a:t>
-            </a:r>
-          </a:p>
-        </p:txBody>
-      </p:sp>
-      <p:sp>
-        <p:nvSpPr>
           <p:cNvPr id="3" name="Content Placeholder 2">
             <a:extLst>
               <a:ext uri="{FF2B5EF4-FFF2-40B4-BE49-F238E27FC236}">
@@ -6629,10 +8276,330 @@
           </a:p>
         </p:txBody>
       </p:sp>
+      <p:sp>
+        <p:nvSpPr>
+          <p:cNvPr id="11" name="Title 1">
+            <a:extLst>
+              <a:ext uri="{FF2B5EF4-FFF2-40B4-BE49-F238E27FC236}">
+                <a16:creationId xmlns:a16="http://schemas.microsoft.com/office/drawing/2014/main" id="{09484575-B7A3-32C0-CB94-1464B523522C}"/>
+              </a:ext>
+            </a:extLst>
+          </p:cNvPr>
+          <p:cNvSpPr>
+            <a:spLocks noGrp="1"/>
+          </p:cNvSpPr>
+          <p:nvPr>
+            <p:ph type="title"/>
+          </p:nvPr>
+        </p:nvSpPr>
+        <p:spPr>
+          <a:xfrm>
+            <a:off x="838200" y="365125"/>
+            <a:ext cx="3906795" cy="1325563"/>
+          </a:xfrm>
+        </p:spPr>
+        <p:txBody>
+          <a:bodyPr>
+            <a:noAutofit/>
+          </a:bodyPr>
+          <a:lstStyle/>
+          <a:p>
+            <a:r>
+              <a:rPr lang="en-US" sz="3200" dirty="0"/>
+              <a:t>Optimal battery control: Example trace</a:t>
+            </a:r>
+          </a:p>
+        </p:txBody>
+      </p:sp>
     </p:spTree>
     <p:extLst>
       <p:ext uri="{BB962C8B-B14F-4D97-AF65-F5344CB8AC3E}">
         <p14:creationId xmlns:p14="http://schemas.microsoft.com/office/powerpoint/2010/main" val="4056301018"/>
+      </p:ext>
+    </p:extLst>
+  </p:cSld>
+  <p:clrMapOvr>
+    <a:masterClrMapping/>
+  </p:clrMapOvr>
+</p:sld>
+</file>
+
+<file path=ppt/slides/slide6.xml><?xml version="1.0" encoding="utf-8"?>
+<p:sld xmlns:a="http://schemas.openxmlformats.org/drawingml/2006/main" xmlns:r="http://schemas.openxmlformats.org/officeDocument/2006/relationships" xmlns:p="http://schemas.openxmlformats.org/presentationml/2006/main">
+  <p:cSld>
+    <p:spTree>
+      <p:nvGrpSpPr>
+        <p:cNvPr id="1" name="">
+          <a:extLst>
+            <a:ext uri="{FF2B5EF4-FFF2-40B4-BE49-F238E27FC236}">
+              <a16:creationId xmlns:a16="http://schemas.microsoft.com/office/drawing/2014/main" id="{7A8840CF-BE0F-A40B-462F-F0C09B9FD251}"/>
+            </a:ext>
+          </a:extLst>
+        </p:cNvPr>
+        <p:cNvGrpSpPr/>
+        <p:nvPr/>
+      </p:nvGrpSpPr>
+      <p:grpSpPr>
+        <a:xfrm>
+          <a:off x="0" y="0"/>
+          <a:ext cx="0" cy="0"/>
+          <a:chOff x="0" y="0"/>
+          <a:chExt cx="0" cy="0"/>
+        </a:xfrm>
+      </p:grpSpPr>
+      <p:sp>
+        <p:nvSpPr>
+          <p:cNvPr id="2" name="Title 1">
+            <a:extLst>
+              <a:ext uri="{FF2B5EF4-FFF2-40B4-BE49-F238E27FC236}">
+                <a16:creationId xmlns:a16="http://schemas.microsoft.com/office/drawing/2014/main" id="{6B74ED85-D9DA-1953-A73A-A17273779053}"/>
+              </a:ext>
+            </a:extLst>
+          </p:cNvPr>
+          <p:cNvSpPr>
+            <a:spLocks noGrp="1"/>
+          </p:cNvSpPr>
+          <p:nvPr>
+            <p:ph type="title"/>
+          </p:nvPr>
+        </p:nvSpPr>
+        <p:spPr>
+          <a:xfrm>
+            <a:off x="838200" y="365125"/>
+            <a:ext cx="4020879" cy="1325563"/>
+          </a:xfrm>
+        </p:spPr>
+        <p:txBody>
+          <a:bodyPr/>
+          <a:lstStyle/>
+          <a:p>
+            <a:r>
+              <a:rPr lang="en-US" dirty="0"/>
+              <a:t>Compare to naïve controllers</a:t>
+            </a:r>
+          </a:p>
+        </p:txBody>
+      </p:sp>
+      <p:sp>
+        <p:nvSpPr>
+          <p:cNvPr id="3" name="Content Placeholder 2">
+            <a:extLst>
+              <a:ext uri="{FF2B5EF4-FFF2-40B4-BE49-F238E27FC236}">
+                <a16:creationId xmlns:a16="http://schemas.microsoft.com/office/drawing/2014/main" id="{2597645A-DBE1-3EE8-8046-86F1C1BFDD2C}"/>
+              </a:ext>
+            </a:extLst>
+          </p:cNvPr>
+          <p:cNvSpPr>
+            <a:spLocks noGrp="1"/>
+          </p:cNvSpPr>
+          <p:nvPr>
+            <p:ph idx="1"/>
+          </p:nvPr>
+        </p:nvSpPr>
+        <p:spPr>
+          <a:xfrm>
+            <a:off x="838200" y="1825624"/>
+            <a:ext cx="3797595" cy="4871737"/>
+          </a:xfrm>
+        </p:spPr>
+        <p:txBody>
+          <a:bodyPr>
+            <a:normAutofit fontScale="92500" lnSpcReduction="10000"/>
+          </a:bodyPr>
+          <a:lstStyle/>
+          <a:p>
+            <a:r>
+              <a:rPr lang="en-US" dirty="0"/>
+              <a:t>Q=24GWh</a:t>
+            </a:r>
+          </a:p>
+          <a:p>
+            <a:r>
+              <a:rPr lang="en-US" dirty="0"/>
+              <a:t>Thin orange is battery priority</a:t>
+            </a:r>
+          </a:p>
+          <a:p>
+            <a:r>
+              <a:rPr lang="en-US" dirty="0"/>
+              <a:t>Thin green is utility priority</a:t>
+            </a:r>
+          </a:p>
+          <a:p>
+            <a:r>
+              <a:rPr lang="en-US" dirty="0"/>
+              <a:t>At this battery size, neither naïve controller can avoid blackouts completely</a:t>
+            </a:r>
+          </a:p>
+          <a:p>
+            <a:r>
+              <a:rPr lang="en-US" dirty="0"/>
+              <a:t>Totals ordering: optimal, battery priority, utility priority</a:t>
+            </a:r>
+          </a:p>
+        </p:txBody>
+      </p:sp>
+      <p:pic>
+        <p:nvPicPr>
+          <p:cNvPr id="1026" name="Picture 2">
+            <a:extLst>
+              <a:ext uri="{FF2B5EF4-FFF2-40B4-BE49-F238E27FC236}">
+                <a16:creationId xmlns:a16="http://schemas.microsoft.com/office/drawing/2014/main" id="{9B840199-4F5E-F958-C317-E9EC5821C09D}"/>
+              </a:ext>
+            </a:extLst>
+          </p:cNvPr>
+          <p:cNvPicPr>
+            <a:picLocks noChangeAspect="1" noChangeArrowheads="1"/>
+          </p:cNvPicPr>
+          <p:nvPr/>
+        </p:nvPicPr>
+        <p:blipFill>
+          <a:blip r:embed="rId2"/>
+          <a:srcRect/>
+          <a:stretch/>
+        </p:blipFill>
+        <p:spPr bwMode="auto">
+          <a:xfrm>
+            <a:off x="4643148" y="685419"/>
+            <a:ext cx="7264437" cy="4329310"/>
+          </a:xfrm>
+          <a:prstGeom prst="rect">
+            <a:avLst/>
+          </a:prstGeom>
+          <a:noFill/>
+          <a:extLst>
+            <a:ext uri="{909E8E84-426E-40DD-AFC4-6F175D3DCCD1}">
+              <a14:hiddenFill xmlns:a14="http://schemas.microsoft.com/office/drawing/2010/main">
+                <a:solidFill>
+                  <a:srgbClr val="FFFFFF"/>
+                </a:solidFill>
+              </a14:hiddenFill>
+            </a:ext>
+          </a:extLst>
+        </p:spPr>
+      </p:pic>
+    </p:spTree>
+    <p:extLst>
+      <p:ext uri="{BB962C8B-B14F-4D97-AF65-F5344CB8AC3E}">
+        <p14:creationId xmlns:p14="http://schemas.microsoft.com/office/powerpoint/2010/main" val="32291954"/>
+      </p:ext>
+    </p:extLst>
+  </p:cSld>
+  <p:clrMapOvr>
+    <a:masterClrMapping/>
+  </p:clrMapOvr>
+</p:sld>
+</file>
+
+<file path=ppt/slides/slide7.xml><?xml version="1.0" encoding="utf-8"?>
+<p:sld xmlns:a="http://schemas.openxmlformats.org/drawingml/2006/main" xmlns:r="http://schemas.openxmlformats.org/officeDocument/2006/relationships" xmlns:p="http://schemas.openxmlformats.org/presentationml/2006/main">
+  <p:cSld>
+    <p:spTree>
+      <p:nvGrpSpPr>
+        <p:cNvPr id="1" name=""/>
+        <p:cNvGrpSpPr/>
+        <p:nvPr/>
+      </p:nvGrpSpPr>
+      <p:grpSpPr>
+        <a:xfrm>
+          <a:off x="0" y="0"/>
+          <a:ext cx="0" cy="0"/>
+          <a:chOff x="0" y="0"/>
+          <a:chExt cx="0" cy="0"/>
+        </a:xfrm>
+      </p:grpSpPr>
+      <p:sp>
+        <p:nvSpPr>
+          <p:cNvPr id="2" name="Title 1">
+            <a:extLst>
+              <a:ext uri="{FF2B5EF4-FFF2-40B4-BE49-F238E27FC236}">
+                <a16:creationId xmlns:a16="http://schemas.microsoft.com/office/drawing/2014/main" id="{0B3DD905-1A56-1A0B-A15D-CEA30554D66B}"/>
+              </a:ext>
+            </a:extLst>
+          </p:cNvPr>
+          <p:cNvSpPr>
+            <a:spLocks noGrp="1"/>
+          </p:cNvSpPr>
+          <p:nvPr>
+            <p:ph type="title"/>
+          </p:nvPr>
+        </p:nvSpPr>
+        <p:spPr/>
+        <p:txBody>
+          <a:bodyPr/>
+          <a:lstStyle/>
+          <a:p>
+            <a:r>
+              <a:rPr lang="en-US" dirty="0"/>
+              <a:t>Capacity needed to cover event</a:t>
+            </a:r>
+          </a:p>
+        </p:txBody>
+      </p:sp>
+      <p:graphicFrame>
+        <p:nvGraphicFramePr>
+          <p:cNvPr id="4" name="Chart 3">
+            <a:extLst>
+              <a:ext uri="{FF2B5EF4-FFF2-40B4-BE49-F238E27FC236}">
+                <a16:creationId xmlns:a16="http://schemas.microsoft.com/office/drawing/2014/main" id="{E7A8BDB7-6162-C53C-5BAF-EFC681199571}"/>
+              </a:ext>
+            </a:extLst>
+          </p:cNvPr>
+          <p:cNvGraphicFramePr>
+            <a:graphicFrameLocks/>
+          </p:cNvGraphicFramePr>
+          <p:nvPr>
+            <p:extLst>
+              <p:ext uri="{D42A27DB-BD31-4B8C-83A1-F6EECF244321}">
+                <p14:modId xmlns:p14="http://schemas.microsoft.com/office/powerpoint/2010/main" val="1210454426"/>
+              </p:ext>
+            </p:extLst>
+          </p:nvPr>
+        </p:nvGraphicFramePr>
+        <p:xfrm>
+          <a:off x="0" y="1821764"/>
+          <a:ext cx="6083300" cy="4483100"/>
+        </p:xfrm>
+        <a:graphic>
+          <a:graphicData uri="http://schemas.openxmlformats.org/drawingml/2006/chart">
+            <c:chart xmlns:c="http://schemas.openxmlformats.org/drawingml/2006/chart" xmlns:r="http://schemas.openxmlformats.org/officeDocument/2006/relationships" r:id="rId2"/>
+          </a:graphicData>
+        </a:graphic>
+      </p:graphicFrame>
+      <p:graphicFrame>
+        <p:nvGraphicFramePr>
+          <p:cNvPr id="5" name="Chart 4">
+            <a:extLst>
+              <a:ext uri="{FF2B5EF4-FFF2-40B4-BE49-F238E27FC236}">
+                <a16:creationId xmlns:a16="http://schemas.microsoft.com/office/drawing/2014/main" id="{C4733E5B-F7DD-9548-89D3-53583251CE37}"/>
+              </a:ext>
+            </a:extLst>
+          </p:cNvPr>
+          <p:cNvGraphicFramePr>
+            <a:graphicFrameLocks/>
+          </p:cNvGraphicFramePr>
+          <p:nvPr>
+            <p:extLst>
+              <p:ext uri="{D42A27DB-BD31-4B8C-83A1-F6EECF244321}">
+                <p14:modId xmlns:p14="http://schemas.microsoft.com/office/powerpoint/2010/main" val="484463612"/>
+              </p:ext>
+            </p:extLst>
+          </p:nvPr>
+        </p:nvGraphicFramePr>
+        <p:xfrm>
+          <a:off x="6024092" y="1821764"/>
+          <a:ext cx="6083300" cy="4483100"/>
+        </p:xfrm>
+        <a:graphic>
+          <a:graphicData uri="http://schemas.openxmlformats.org/drawingml/2006/chart">
+            <c:chart xmlns:c="http://schemas.openxmlformats.org/drawingml/2006/chart" xmlns:r="http://schemas.openxmlformats.org/officeDocument/2006/relationships" r:id="rId3"/>
+          </a:graphicData>
+        </a:graphic>
+      </p:graphicFrame>
+    </p:spTree>
+    <p:extLst>
+      <p:ext uri="{BB962C8B-B14F-4D97-AF65-F5344CB8AC3E}">
+        <p14:creationId xmlns:p14="http://schemas.microsoft.com/office/powerpoint/2010/main" val="2088321231"/>
       </p:ext>
     </p:extLst>
   </p:cSld>
